--- a/presentations/lebron-heist/lebron-sixers-heist.pptx
+++ b/presentations/lebron-heist/lebron-sixers-heist.pptx
@@ -17,10 +17,9 @@
     <p:sldId id="265" r:id="rId11"/>
     <p:sldId id="266" r:id="rId12"/>
     <p:sldId id="267" r:id="rId13"/>
-    <p:sldId id="268" r:id="rId14"/>
   </p:sldIdLst>
   <p:notesMasterIdLst>
-    <p:notesMasterId r:id="rId15"/>
+    <p:notesMasterId r:id="rId14"/>
   </p:notesMasterIdLst>
   <p:sldSz cx="12192000" cy="6858000"/>
   <p:notesSz cx="6858000" cy="12192000"/>
@@ -3716,7 +3715,7 @@
           <a:p>
             <a:r>
               <a:rPr lang="en-US" dirty="0"/>
-              <a:t>Recreates the opening thesis of the video: LeBron going to the 76ers is the biggest heist in NBA free agency history — the one player who has organized top-5 offenses as a solo hub for two decades signed for $8M over two years with the exact team whose fatal flaw is the thing he fixes.</a:t>
+              <a:t>The thesis: LeBron going to the 76ers is the biggest heist in NBA free agency history — the player who has organized top-5 offenses as a solo hub for two decades signed for $8M over two years with the exact team whose fatal flaw is the thing he fixes.</a:t>
             </a:r>
             <a:endParaRPr lang="en-US" dirty="0"/>
           </a:p>
@@ -3804,7 +3803,7 @@
           <a:p>
             <a:r>
               <a:rPr lang="en-US" dirty="0"/>
-              <a:t>Her chart: usage 27.2→22, TS .594→.627 ('63%' bar). Mine: 21.5% usage central, TS .615 central with .60-.63 range — her TS sits at my optimistic bound. Her mixing of a 63% bar next to usage percentages is also why my version separates the two scales into two charts.</a:t>
+              <a:t>The paradox of the signing: giving LeBron less to do makes him better. Usage projects to ~21-22% (the Bosh/Love arrival sheds applied to him), and the efficiency tradeoff projects TS toward .61-.63 at age 42.</a:t>
             </a:r>
             <a:endParaRPr lang="en-US" dirty="0"/>
           </a:p>
@@ -3980,7 +3979,7 @@
           <a:p>
             <a:r>
               <a:rPr lang="en-US" dirty="0"/>
-              <a:t>The honest scoreboard: most of her data was excellent (Maxey/Brown/LeBron numbers verify to the decimal); the Edgecombe chart and the LeBron assist-count are the two real errors; her curve had the right shape with a soft baseline.</a:t>
+              <a:t>Method summary and provenance. All scripts and the source data file (data.md) accompany the deck in the repository.</a:t>
             </a:r>
             <a:endParaRPr lang="en-US" dirty="0"/>
           </a:p>
@@ -4004,94 +4003,6 @@
             <a:fld id="{F7021451-1387-4CA6-816F-3879F97B5CBC}" type="slidenum">
               <a:rPr lang="en-US"/>
               <a:t>12</a:t>
-            </a:fld>
-            <a:endParaRPr lang="en-US"/>
-          </a:p>
-        </p:txBody>
-      </p:sp>
-    </p:spTree>
-    <p:extLst>
-      <p:ext uri="{BB962C8B-B14F-4D97-AF65-F5344CB8AC3E}">
-        <p14:creationId xmlns:p14="http://schemas.microsoft.com/office/powerpoint/2010/main" val="1024086991"/>
-      </p:ext>
-    </p:extLst>
-  </p:cSld>
-  <p:clrMapOvr>
-    <a:masterClrMapping/>
-  </p:clrMapOvr>
-</p:notes>
-</file>
-
-<file path=ppt/notesSlides/notesSlide13.xml><?xml version="1.0" encoding="utf-8"?>
-<p:notes xmlns:a="http://schemas.openxmlformats.org/drawingml/2006/main" xmlns:r="http://schemas.openxmlformats.org/officeDocument/2006/relationships" xmlns:p="http://schemas.openxmlformats.org/presentationml/2006/main">
-  <p:cSld>
-    <p:spTree>
-      <p:nvGrpSpPr>
-        <p:cNvPr id="1" name=""/>
-        <p:cNvGrpSpPr/>
-        <p:nvPr/>
-      </p:nvGrpSpPr>
-      <p:grpSpPr>
-        <a:xfrm>
-          <a:off x="0" y="0"/>
-          <a:ext cx="0" cy="0"/>
-          <a:chOff x="0" y="0"/>
-          <a:chExt cx="0" cy="0"/>
-        </a:xfrm>
-      </p:grpSpPr>
-      <p:sp>
-        <p:nvSpPr>
-          <p:cNvPr id="2" name="Slide Image Placeholder 1"/>
-          <p:cNvSpPr>
-            <a:spLocks noGrp="1" noRot="1" noChangeAspect="1"/>
-          </p:cNvSpPr>
-          <p:nvPr>
-            <p:ph type="sldImg"/>
-          </p:nvPr>
-        </p:nvSpPr>
-        <p:spPr/>
-      </p:sp>
-      <p:sp>
-        <p:nvSpPr>
-          <p:cNvPr id="3" name="Notes Placeholder 2"/>
-          <p:cNvSpPr>
-            <a:spLocks noGrp="1"/>
-          </p:cNvSpPr>
-          <p:nvPr>
-            <p:ph type="body" idx="1"/>
-          </p:nvPr>
-        </p:nvSpPr>
-        <p:spPr/>
-        <p:txBody>
-          <a:bodyPr/>
-          <a:lstStyle/>
-          <a:p>
-            <a:r>
-              <a:rPr lang="en-US" dirty="0"/>
-              <a:t>Method summary and provenance. All scripts and the source data file (data.md) accompany the deck in the repository.</a:t>
-            </a:r>
-            <a:endParaRPr lang="en-US" dirty="0"/>
-          </a:p>
-        </p:txBody>
-      </p:sp>
-      <p:sp>
-        <p:nvSpPr>
-          <p:cNvPr id="4" name="Slide Number Placeholder 3"/>
-          <p:cNvSpPr>
-            <a:spLocks noGrp="1"/>
-          </p:cNvSpPr>
-          <p:nvPr>
-            <p:ph type="sldNum" sz="quarter" idx="10"/>
-          </p:nvPr>
-        </p:nvSpPr>
-        <p:spPr/>
-        <p:txBody>
-          <a:bodyPr/>
-          <a:lstStyle/>
-          <a:p>
-            <a:fld id="{F7021451-1387-4CA6-816F-3879F97B5CBC}" type="slidenum">
-              <a:rPr lang="en-US"/>
-              <a:t>13</a:t>
             </a:fld>
             <a:endParaRPr lang="en-US"/>
           </a:p>
@@ -4156,7 +4067,7 @@
           <a:p>
             <a:r>
               <a:rPr lang="en-US" dirty="0"/>
-              <a:t>Her setup: 'a player with arguably the greatest playoff IQ alive just signed for only $8 million on a two-year contract.' Verified: $3.876M year one with a year-two player option; he made $52.6M in 2025-26.</a:t>
+              <a:t>The deal itself: $3.876M year one with a year-two player option — the 10+ year veteran minimum. He made $52.6M with the Lakers in 2025-26; this is the largest pay cut in NBA history.</a:t>
             </a:r>
             <a:endParaRPr lang="en-US" dirty="0"/>
           </a:p>
@@ -4244,7 +4155,7 @@
           <a:p>
             <a:r>
               <a:rPr lang="en-US" dirty="0"/>
-              <a:t>Her thesis restated with verified numbers: 'the one player who has organized top-5 offenses as the solo hub over the last two decades… to the exact team whose one fatal flaw is the exact thing that he fixes.'</a:t>
+              <a:t>The matchup logic: the Sixers' one structural weakness — shot creation for everyone but Maxey — is precisely LeBron's elite skill. Every red number on the right is a symptom of the same missing pass.</a:t>
             </a:r>
             <a:endParaRPr lang="en-US" dirty="0"/>
           </a:p>
@@ -4332,7 +4243,7 @@
           <a:p>
             <a:r>
               <a:rPr lang="en-US" dirty="0"/>
-              <a:t>Her claim: 'The new Sixers are projected to have 51 wins.' Rebuilt independently: SRS-true 41 + 5 (LeBron) + 3 (Brown full season) + 2 (Embiid health) = 51, and the sportsbook total (50.5) matches.</a:t>
+              <a:t>The win projection: SRS-true 41 + 5 (LeBron) + 3 (Brown full season) + 2 (Embiid health) = 51, and the sportsbook total (50.5) lands in the same place.</a:t>
             </a:r>
             <a:endParaRPr lang="en-US" dirty="0"/>
           </a:p>
@@ -4420,7 +4331,7 @@
           <a:p>
             <a:r>
               <a:rPr lang="en-US" dirty="0"/>
-              <a:t>Her chart: 'FINALS PROBABILITY vs WINS — Log5 model, three playoff rounds', 45→4%, 51→12%, 3.2x. Mine, built from scratch, is steeper: 2.1%→8.1% (3.8x), and the 2.6% empirical rate for 44-47-win teams says the lower baseline is the right one.</a:t>
+              <a:t>Why 51 wins matters so much more than 45: Finals probability is not linear in wins. The Log5 model gives 2.1% at 45 wins and 8.1% at 51 — a 3.8x jump — and the empirical rate for 44-47-win teams (2.6% of berths since 1984) confirms the low starting point.</a:t>
             </a:r>
             <a:endParaRPr lang="en-US" dirty="0"/>
           </a:p>
@@ -4508,7 +4419,7 @@
           <a:p>
             <a:r>
               <a:rPr lang="en-US" dirty="0"/>
-              <a:t>Her chart: 55 / 36 / 45 with n=694 — her baseline and league numbers verify exactly. My projection (46.9%) uses the verified guard-arrival deltas.</a:t>
+              <a:t>Maxey has been the league's most self-reliant high-volume scorer: 55.3% of his makes unassisted vs a 36.3% league mean. The guard-arrival comps project that down to ~47% — easier shots at the same volume.</a:t>
             </a:r>
             <a:endParaRPr lang="en-US" dirty="0"/>
           </a:p>
@@ -4596,7 +4507,7 @@
           <a:p>
             <a:r>
               <a:rPr lang="en-US" dirty="0"/>
-              <a:t>Her chart: 36 / 46 / 48. Verified: 36.4 / 47.6; my projection is slightly higher than hers (51.6 vs 48) because the arrival premium is real and positive.</a:t>
+              <a:t>Brown's assisted share collapsed to 36.4% carrying Boston at a career-high 36.2% usage. Restoring his healthy-co-star baseline (47.6%) plus half the measured LeBron-arrival premium projects ~52% — the easiest shot diet of his career.</a:t>
             </a:r>
             <a:endParaRPr lang="en-US" dirty="0"/>
           </a:p>
@@ -4684,7 +4595,7 @@
           <a:p>
             <a:r>
               <a:rPr lang="en-US" dirty="0"/>
-              <a:t>Her chart: 37 / 52 / 42. The 52%-of-765-assists claim doesn't reproduce; actual 2025-26 profile is 42.1% of 432. My projection still lands almost exactly on hers: 41.2%.</a:t>
+              <a:t>Embiid's 34.9% rim share is remarkably low for an MVP-level center — a symptom of entry passing, not finishing. LeBron's rim-heavy assist profile projects it to ~41%.</a:t>
             </a:r>
             <a:endParaRPr lang="en-US" dirty="0"/>
           </a:p>
@@ -4772,7 +4683,7 @@
           <a:p>
             <a:r>
               <a:rPr lang="en-US" dirty="0"/>
-              <a:t>Her chart: 8 / 10 / 12. Neither the baseline nor the projection survives the play-by-play data; mine: 5.5 / 11.8 / 6.9. Direction right, size overstated.</a:t>
+              <a:t>Edgecombe already hits assisted threes (81% of his 3P makes were assisted) — he just never got corner looks. LeBron's record-setting skip pass projects a ~30% relative jump in the best shot in basketball.</a:t>
             </a:r>
             <a:endParaRPr lang="en-US" dirty="0"/>
           </a:p>
@@ -5279,7 +5190,7 @@
                 <a:ea typeface="Calibri" pitchFamily="34" charset="-122"/>
                 <a:cs typeface="Calibri" pitchFamily="34" charset="-120"/>
               </a:rPr>
-              <a:t>What LeBron James to the 76ers actually means — rebuilt from source data, every number re-derived.</a:t>
+              <a:t>What LeBron James to the 76ers actually means — every number derived from source data.</a:t>
             </a:r>
             <a:endParaRPr lang="en-US" sz="1700" dirty="0"/>
           </a:p>
@@ -5318,21 +5229,7 @@
                 <a:ea typeface="Calibri" pitchFamily="34" charset="-122"/>
                 <a:cs typeface="Calibri" pitchFamily="34" charset="-120"/>
               </a:rPr>
-              <a:t>A data-verified recreation of the viral breakdown by TikTok’s @leah.cammarano. </a:t>
-            </a:r>
-            <a:pPr indent="0" marL="0">
-              <a:buNone/>
-            </a:pPr>
-            <a:r>
-              <a:rPr lang="en-US" sz="1150" i="1" dirty="0">
-                <a:solidFill>
-                  <a:srgbClr val="7E93AC"/>
-                </a:solidFill>
-                <a:latin typeface="Calibri" pitchFamily="34" charset="0"/>
-                <a:ea typeface="Calibri" pitchFamily="34" charset="-122"/>
-                <a:cs typeface="Calibri" pitchFamily="34" charset="-120"/>
-              </a:rPr>
-              <a:t>Her structure and thesis; independent stats, models, and projections throughout.</a:t>
+              <a:t>Verified play-by-play stats, a from-scratch playoff-probability model, and measured history of what happens to teammates when LeBron arrives.</a:t>
             </a:r>
             <a:endParaRPr lang="en-US" sz="1150" dirty="0"/>
           </a:p>
@@ -5600,7 +5497,7 @@
                 <a:ea typeface="Calibri" pitchFamily="34" charset="-122"/>
                 <a:cs typeface="Calibri" pitchFamily="34" charset="-120"/>
               </a:rPr>
-              <a:t>the skill-curve tradeoff (+0.3-0.6 TS pts per usage point shed, minus an age-42 drag) projects .594 → .60-.63. The video’s .627 is the optimistic edge of that band; his career best is .649 (2013-14).
+              <a:t>the skill-curve tradeoff (+0.3-0.6 TS pts per usage point shed, minus an age-42 drag) projects .594 → .60-.63 — brushing career-best territory (.649 in 2013-14) at the top of the band.
 </a:t>
             </a:r>
             <a:pPr indent="0" marL="0">
@@ -6186,3781 +6083,6 @@
 <file path=ppt/slides/slide12.xml><?xml version="1.0" encoding="utf-8"?>
 <p:sld xmlns:a="http://schemas.openxmlformats.org/drawingml/2006/main" xmlns:r="http://schemas.openxmlformats.org/officeDocument/2006/relationships" xmlns:p="http://schemas.openxmlformats.org/presentationml/2006/main">
   <p:cSld name="Slide 12">
-    <p:spTree>
-      <p:nvGrpSpPr>
-        <p:cNvPr id="1" name=""/>
-        <p:cNvGrpSpPr/>
-        <p:nvPr/>
-      </p:nvGrpSpPr>
-      <p:grpSpPr>
-        <a:xfrm>
-          <a:off x="0" y="0"/>
-          <a:ext cx="0" cy="0"/>
-          <a:chOff x="0" y="0"/>
-          <a:chExt cx="0" cy="0"/>
-        </a:xfrm>
-      </p:grpSpPr>
-      <p:sp>
-        <p:nvSpPr>
-          <p:cNvPr id="2" name="Text 0"/>
-          <p:cNvSpPr/>
-          <p:nvPr/>
-        </p:nvSpPr>
-        <p:spPr>
-          <a:xfrm>
-            <a:off x="548640" y="384048"/>
-            <a:ext cx="11091672" cy="274320"/>
-          </a:xfrm>
-          <a:prstGeom prst="rect">
-            <a:avLst/>
-          </a:prstGeom>
-          <a:noFill/>
-          <a:ln/>
-        </p:spPr>
-        <p:txBody>
-          <a:bodyPr wrap="square" lIns="0" tIns="0" rIns="0" bIns="0" rtlCol="0" anchor="ctr"/>
-          <a:lstStyle/>
-          <a:p>
-            <a:pPr indent="0" marL="0">
-              <a:buNone/>
-            </a:pPr>
-            <a:r>
-              <a:rPr lang="en-US" sz="1200" b="1" spc="200" kern="0" dirty="0">
-                <a:solidFill>
-                  <a:srgbClr val="C8102E"/>
-                </a:solidFill>
-                <a:latin typeface="Calibri" pitchFamily="34" charset="0"/>
-                <a:ea typeface="Calibri" pitchFamily="34" charset="-122"/>
-                <a:cs typeface="Calibri" pitchFamily="34" charset="-120"/>
-              </a:rPr>
-              <a:t>FACT-CHECK SCOREBOARD</a:t>
-            </a:r>
-            <a:endParaRPr lang="en-US" sz="1200" dirty="0"/>
-          </a:p>
-        </p:txBody>
-      </p:sp>
-      <p:sp>
-        <p:nvSpPr>
-          <p:cNvPr id="3" name="Text 1"/>
-          <p:cNvSpPr/>
-          <p:nvPr/>
-        </p:nvSpPr>
-        <p:spPr>
-          <a:xfrm>
-            <a:off x="548640" y="658368"/>
-            <a:ext cx="11091672" cy="685800"/>
-          </a:xfrm>
-          <a:prstGeom prst="rect">
-            <a:avLst/>
-          </a:prstGeom>
-          <a:noFill/>
-          <a:ln/>
-        </p:spPr>
-        <p:txBody>
-          <a:bodyPr wrap="square" lIns="0" tIns="0" rIns="0" bIns="0" rtlCol="0" anchor="ctr"/>
-          <a:lstStyle/>
-          <a:p>
-            <a:pPr indent="0" marL="0">
-              <a:buNone/>
-            </a:pPr>
-            <a:r>
-              <a:rPr lang="en-US" sz="2800" b="1" dirty="0">
-                <a:solidFill>
-                  <a:srgbClr val="002B5C"/>
-                </a:solidFill>
-                <a:latin typeface="Cambria" pitchFamily="34" charset="0"/>
-                <a:ea typeface="Cambria" pitchFamily="34" charset="-122"/>
-                <a:cs typeface="Cambria" pitchFamily="34" charset="-120"/>
-              </a:rPr>
-              <a:t>Her numbers vs. the verified data</a:t>
-            </a:r>
-            <a:endParaRPr lang="en-US" sz="2800" dirty="0"/>
-          </a:p>
-        </p:txBody>
-      </p:sp>
-      <p:graphicFrame>
-        <p:nvGraphicFramePr>
-          <p:cNvPr id="13" name="Table 0"/>
-          <p:cNvGraphicFramePr>
-            <a:graphicFrameLocks noGrp="1"/>
-          </p:cNvGraphicFramePr>
-          <p:nvPr>
-            <p:extLst>
-              <p:ext uri="{D42A27DB-BD31-4B8C-83A1-F6EECF244321}">
-                <p14:modId xmlns:p14="http://schemas.microsoft.com/office/powerpoint/2010/main" val="1579011935"/>
-              </p:ext>
-            </p:extLst>
-          </p:nvPr>
-        </p:nvGraphicFramePr>
-        <p:xfrm>
-          <a:off x="548640" y="1572768"/>
-          <a:ext cx="11091672" cy="914400"/>
-        </p:xfrm>
-        <a:graphic>
-          <a:graphicData uri="http://schemas.openxmlformats.org/drawingml/2006/table">
-            <a:tbl>
-              <a:tblPr/>
-              <a:tblGrid>
-                <a:gridCol w="4480560"/>
-                <a:gridCol w="2011680"/>
-                <a:gridCol w="3227832"/>
-                <a:gridCol w="1371600"/>
-              </a:tblGrid>
-              <a:tr h="310896">
-                <a:tc>
-                  <a:txBody>
-                    <a:bodyPr/>
-                    <a:lstStyle/>
-                    <a:p>
-                      <a:pPr indent="0" marL="0">
-                        <a:buNone/>
-                      </a:pPr>
-                      <a:r>
-                        <a:rPr lang="en-US" sz="1050" b="1" dirty="0">
-                          <a:solidFill>
-                            <a:srgbClr val="FFFFFF"/>
-                          </a:solidFill>
-                          <a:latin typeface="Calibri" pitchFamily="34" charset="0"/>
-                          <a:ea typeface="Calibri" pitchFamily="34" charset="-122"/>
-                          <a:cs typeface="Calibri" pitchFamily="34" charset="-120"/>
-                        </a:rPr>
-                        <a:t>Claim in video</a:t>
-                      </a:r>
-                      <a:endParaRPr lang="en-US" sz="1050" dirty="0">
-                        <a:latin typeface="Calibri" charset="0"/>
-                        <a:ea typeface="Calibri" charset="0"/>
-                        <a:cs typeface="Calibri" charset="0"/>
-                      </a:endParaRPr>
-                    </a:p>
-                  </a:txBody>
-                  <a:tcPr marL="91440" marR="91440" marT="45720" marB="45720" anchor="ctr">
-                    <a:lnL w="9525" cap="flat" cmpd="sng" algn="ctr">
-                      <a:solidFill>
-                        <a:srgbClr val="E4E9EF"/>
-                      </a:solidFill>
-                      <a:prstDash val="solid"/>
-                      <a:round/>
-                      <a:headEnd type="none" w="med" len="med"/>
-                      <a:tailEnd type="none" w="med" len="med"/>
-                    </a:lnL>
-                    <a:lnR w="9525" cap="flat" cmpd="sng" algn="ctr">
-                      <a:solidFill>
-                        <a:srgbClr val="E4E9EF"/>
-                      </a:solidFill>
-                      <a:prstDash val="solid"/>
-                      <a:round/>
-                      <a:headEnd type="none" w="med" len="med"/>
-                      <a:tailEnd type="none" w="med" len="med"/>
-                    </a:lnR>
-                    <a:lnT w="9525" cap="flat" cmpd="sng" algn="ctr">
-                      <a:solidFill>
-                        <a:srgbClr val="E4E9EF"/>
-                      </a:solidFill>
-                      <a:prstDash val="solid"/>
-                      <a:round/>
-                      <a:headEnd type="none" w="med" len="med"/>
-                      <a:tailEnd type="none" w="med" len="med"/>
-                    </a:lnT>
-                    <a:lnB w="9525" cap="flat" cmpd="sng" algn="ctr">
-                      <a:solidFill>
-                        <a:srgbClr val="E4E9EF"/>
-                      </a:solidFill>
-                      <a:prstDash val="solid"/>
-                      <a:round/>
-                      <a:headEnd type="none" w="med" len="med"/>
-                      <a:tailEnd type="none" w="med" len="med"/>
-                    </a:lnB>
-                    <a:solidFill>
-                      <a:srgbClr val="002B5C"/>
-                    </a:solidFill>
-                  </a:tcPr>
-                </a:tc>
-                <a:tc>
-                  <a:txBody>
-                    <a:bodyPr/>
-                    <a:lstStyle/>
-                    <a:p>
-                      <a:pPr algn="ctr" indent="0" marL="0">
-                        <a:buNone/>
-                      </a:pPr>
-                      <a:r>
-                        <a:rPr lang="en-US" sz="1050" b="1" dirty="0">
-                          <a:solidFill>
-                            <a:srgbClr val="FFFFFF"/>
-                          </a:solidFill>
-                          <a:latin typeface="Calibri" pitchFamily="34" charset="0"/>
-                          <a:ea typeface="Calibri" pitchFamily="34" charset="-122"/>
-                          <a:cs typeface="Calibri" pitchFamily="34" charset="-120"/>
-                        </a:rPr>
-                        <a:t>Video</a:t>
-                      </a:r>
-                      <a:endParaRPr lang="en-US" sz="1050" dirty="0">
-                        <a:latin typeface="Calibri" charset="0"/>
-                        <a:ea typeface="Calibri" charset="0"/>
-                        <a:cs typeface="Calibri" charset="0"/>
-                      </a:endParaRPr>
-                    </a:p>
-                  </a:txBody>
-                  <a:tcPr marL="91440" marR="91440" marT="45720" marB="45720" anchor="ctr">
-                    <a:lnL w="9525" cap="flat" cmpd="sng" algn="ctr">
-                      <a:solidFill>
-                        <a:srgbClr val="E4E9EF"/>
-                      </a:solidFill>
-                      <a:prstDash val="solid"/>
-                      <a:round/>
-                      <a:headEnd type="none" w="med" len="med"/>
-                      <a:tailEnd type="none" w="med" len="med"/>
-                    </a:lnL>
-                    <a:lnR w="9525" cap="flat" cmpd="sng" algn="ctr">
-                      <a:solidFill>
-                        <a:srgbClr val="E4E9EF"/>
-                      </a:solidFill>
-                      <a:prstDash val="solid"/>
-                      <a:round/>
-                      <a:headEnd type="none" w="med" len="med"/>
-                      <a:tailEnd type="none" w="med" len="med"/>
-                    </a:lnR>
-                    <a:lnT w="9525" cap="flat" cmpd="sng" algn="ctr">
-                      <a:solidFill>
-                        <a:srgbClr val="E4E9EF"/>
-                      </a:solidFill>
-                      <a:prstDash val="solid"/>
-                      <a:round/>
-                      <a:headEnd type="none" w="med" len="med"/>
-                      <a:tailEnd type="none" w="med" len="med"/>
-                    </a:lnT>
-                    <a:lnB w="9525" cap="flat" cmpd="sng" algn="ctr">
-                      <a:solidFill>
-                        <a:srgbClr val="E4E9EF"/>
-                      </a:solidFill>
-                      <a:prstDash val="solid"/>
-                      <a:round/>
-                      <a:headEnd type="none" w="med" len="med"/>
-                      <a:tailEnd type="none" w="med" len="med"/>
-                    </a:lnB>
-                    <a:solidFill>
-                      <a:srgbClr val="002B5C"/>
-                    </a:solidFill>
-                  </a:tcPr>
-                </a:tc>
-                <a:tc>
-                  <a:txBody>
-                    <a:bodyPr/>
-                    <a:lstStyle/>
-                    <a:p>
-                      <a:pPr algn="ctr" indent="0" marL="0">
-                        <a:buNone/>
-                      </a:pPr>
-                      <a:r>
-                        <a:rPr lang="en-US" sz="1050" b="1" dirty="0">
-                          <a:solidFill>
-                            <a:srgbClr val="FFFFFF"/>
-                          </a:solidFill>
-                          <a:latin typeface="Calibri" pitchFamily="34" charset="0"/>
-                          <a:ea typeface="Calibri" pitchFamily="34" charset="-122"/>
-                          <a:cs typeface="Calibri" pitchFamily="34" charset="-120"/>
-                        </a:rPr>
-                        <a:t>Verified / my calc</a:t>
-                      </a:r>
-                      <a:endParaRPr lang="en-US" sz="1050" dirty="0">
-                        <a:latin typeface="Calibri" charset="0"/>
-                        <a:ea typeface="Calibri" charset="0"/>
-                        <a:cs typeface="Calibri" charset="0"/>
-                      </a:endParaRPr>
-                    </a:p>
-                  </a:txBody>
-                  <a:tcPr marL="91440" marR="91440" marT="45720" marB="45720" anchor="ctr">
-                    <a:lnL w="9525" cap="flat" cmpd="sng" algn="ctr">
-                      <a:solidFill>
-                        <a:srgbClr val="E4E9EF"/>
-                      </a:solidFill>
-                      <a:prstDash val="solid"/>
-                      <a:round/>
-                      <a:headEnd type="none" w="med" len="med"/>
-                      <a:tailEnd type="none" w="med" len="med"/>
-                    </a:lnL>
-                    <a:lnR w="9525" cap="flat" cmpd="sng" algn="ctr">
-                      <a:solidFill>
-                        <a:srgbClr val="E4E9EF"/>
-                      </a:solidFill>
-                      <a:prstDash val="solid"/>
-                      <a:round/>
-                      <a:headEnd type="none" w="med" len="med"/>
-                      <a:tailEnd type="none" w="med" len="med"/>
-                    </a:lnR>
-                    <a:lnT w="9525" cap="flat" cmpd="sng" algn="ctr">
-                      <a:solidFill>
-                        <a:srgbClr val="E4E9EF"/>
-                      </a:solidFill>
-                      <a:prstDash val="solid"/>
-                      <a:round/>
-                      <a:headEnd type="none" w="med" len="med"/>
-                      <a:tailEnd type="none" w="med" len="med"/>
-                    </a:lnT>
-                    <a:lnB w="9525" cap="flat" cmpd="sng" algn="ctr">
-                      <a:solidFill>
-                        <a:srgbClr val="E4E9EF"/>
-                      </a:solidFill>
-                      <a:prstDash val="solid"/>
-                      <a:round/>
-                      <a:headEnd type="none" w="med" len="med"/>
-                      <a:tailEnd type="none" w="med" len="med"/>
-                    </a:lnB>
-                    <a:solidFill>
-                      <a:srgbClr val="002B5C"/>
-                    </a:solidFill>
-                  </a:tcPr>
-                </a:tc>
-                <a:tc>
-                  <a:txBody>
-                    <a:bodyPr/>
-                    <a:lstStyle/>
-                    <a:p>
-                      <a:pPr algn="ctr" indent="0" marL="0">
-                        <a:buNone/>
-                      </a:pPr>
-                      <a:r>
-                        <a:rPr lang="en-US" sz="1050" b="1" dirty="0">
-                          <a:solidFill>
-                            <a:srgbClr val="FFFFFF"/>
-                          </a:solidFill>
-                          <a:latin typeface="Calibri" pitchFamily="34" charset="0"/>
-                          <a:ea typeface="Calibri" pitchFamily="34" charset="-122"/>
-                          <a:cs typeface="Calibri" pitchFamily="34" charset="-120"/>
-                        </a:rPr>
-                        <a:t>Verdict</a:t>
-                      </a:r>
-                      <a:endParaRPr lang="en-US" sz="1050" dirty="0">
-                        <a:latin typeface="Calibri" charset="0"/>
-                        <a:ea typeface="Calibri" charset="0"/>
-                        <a:cs typeface="Calibri" charset="0"/>
-                      </a:endParaRPr>
-                    </a:p>
-                  </a:txBody>
-                  <a:tcPr marL="91440" marR="91440" marT="45720" marB="45720" anchor="ctr">
-                    <a:lnL w="9525" cap="flat" cmpd="sng" algn="ctr">
-                      <a:solidFill>
-                        <a:srgbClr val="E4E9EF"/>
-                      </a:solidFill>
-                      <a:prstDash val="solid"/>
-                      <a:round/>
-                      <a:headEnd type="none" w="med" len="med"/>
-                      <a:tailEnd type="none" w="med" len="med"/>
-                    </a:lnL>
-                    <a:lnR w="9525" cap="flat" cmpd="sng" algn="ctr">
-                      <a:solidFill>
-                        <a:srgbClr val="E4E9EF"/>
-                      </a:solidFill>
-                      <a:prstDash val="solid"/>
-                      <a:round/>
-                      <a:headEnd type="none" w="med" len="med"/>
-                      <a:tailEnd type="none" w="med" len="med"/>
-                    </a:lnR>
-                    <a:lnT w="9525" cap="flat" cmpd="sng" algn="ctr">
-                      <a:solidFill>
-                        <a:srgbClr val="E4E9EF"/>
-                      </a:solidFill>
-                      <a:prstDash val="solid"/>
-                      <a:round/>
-                      <a:headEnd type="none" w="med" len="med"/>
-                      <a:tailEnd type="none" w="med" len="med"/>
-                    </a:lnT>
-                    <a:lnB w="9525" cap="flat" cmpd="sng" algn="ctr">
-                      <a:solidFill>
-                        <a:srgbClr val="E4E9EF"/>
-                      </a:solidFill>
-                      <a:prstDash val="solid"/>
-                      <a:round/>
-                      <a:headEnd type="none" w="med" len="med"/>
-                      <a:tailEnd type="none" w="med" len="med"/>
-                    </a:lnB>
-                    <a:solidFill>
-                      <a:srgbClr val="002B5C"/>
-                    </a:solidFill>
-                  </a:tcPr>
-                </a:tc>
-              </a:tr>
-              <a:tr h="310896">
-                <a:tc>
-                  <a:txBody>
-                    <a:bodyPr/>
-                    <a:lstStyle/>
-                    <a:p>
-                      <a:pPr indent="0" marL="0">
-                        <a:buNone/>
-                      </a:pPr>
-                      <a:r>
-                        <a:rPr lang="en-US" sz="1050" dirty="0">
-                          <a:solidFill>
-                            <a:srgbClr val="1C2B3A"/>
-                          </a:solidFill>
-                          <a:latin typeface="Calibri" pitchFamily="34" charset="0"/>
-                          <a:ea typeface="Calibri" pitchFamily="34" charset="-122"/>
-                          <a:cs typeface="Calibri" pitchFamily="34" charset="-120"/>
-                        </a:rPr>
-                        <a:t>Sixers 2025-26 wins → projection</a:t>
-                      </a:r>
-                      <a:endParaRPr lang="en-US" sz="1050" dirty="0">
-                        <a:latin typeface="Calibri" charset="0"/>
-                        <a:ea typeface="Calibri" charset="0"/>
-                        <a:cs typeface="Calibri" charset="0"/>
-                      </a:endParaRPr>
-                    </a:p>
-                  </a:txBody>
-                  <a:tcPr marL="91440" marR="91440" marT="45720" marB="45720" anchor="ctr">
-                    <a:lnL w="9525" cap="flat" cmpd="sng" algn="ctr">
-                      <a:solidFill>
-                        <a:srgbClr val="E4E9EF"/>
-                      </a:solidFill>
-                      <a:prstDash val="solid"/>
-                      <a:round/>
-                      <a:headEnd type="none" w="med" len="med"/>
-                      <a:tailEnd type="none" w="med" len="med"/>
-                    </a:lnL>
-                    <a:lnR w="9525" cap="flat" cmpd="sng" algn="ctr">
-                      <a:solidFill>
-                        <a:srgbClr val="E4E9EF"/>
-                      </a:solidFill>
-                      <a:prstDash val="solid"/>
-                      <a:round/>
-                      <a:headEnd type="none" w="med" len="med"/>
-                      <a:tailEnd type="none" w="med" len="med"/>
-                    </a:lnR>
-                    <a:lnT w="9525" cap="flat" cmpd="sng" algn="ctr">
-                      <a:solidFill>
-                        <a:srgbClr val="E4E9EF"/>
-                      </a:solidFill>
-                      <a:prstDash val="solid"/>
-                      <a:round/>
-                      <a:headEnd type="none" w="med" len="med"/>
-                      <a:tailEnd type="none" w="med" len="med"/>
-                    </a:lnT>
-                    <a:lnB w="9525" cap="flat" cmpd="sng" algn="ctr">
-                      <a:solidFill>
-                        <a:srgbClr val="E4E9EF"/>
-                      </a:solidFill>
-                      <a:prstDash val="solid"/>
-                      <a:round/>
-                      <a:headEnd type="none" w="med" len="med"/>
-                      <a:tailEnd type="none" w="med" len="med"/>
-                    </a:lnB>
-                    <a:solidFill>
-                      <a:srgbClr val="FFFFFF"/>
-                    </a:solidFill>
-                  </a:tcPr>
-                </a:tc>
-                <a:tc>
-                  <a:txBody>
-                    <a:bodyPr/>
-                    <a:lstStyle/>
-                    <a:p>
-                      <a:pPr algn="ctr" indent="0" marL="0">
-                        <a:buNone/>
-                      </a:pPr>
-                      <a:r>
-                        <a:rPr lang="en-US" sz="1050" dirty="0">
-                          <a:solidFill>
-                            <a:srgbClr val="1C2B3A"/>
-                          </a:solidFill>
-                          <a:latin typeface="Calibri" pitchFamily="34" charset="0"/>
-                          <a:ea typeface="Calibri" pitchFamily="34" charset="-122"/>
-                          <a:cs typeface="Calibri" pitchFamily="34" charset="-120"/>
-                        </a:rPr>
-                        <a:t>45 → 51</a:t>
-                      </a:r>
-                      <a:endParaRPr lang="en-US" sz="1050" dirty="0">
-                        <a:latin typeface="Calibri" charset="0"/>
-                        <a:ea typeface="Calibri" charset="0"/>
-                        <a:cs typeface="Calibri" charset="0"/>
-                      </a:endParaRPr>
-                    </a:p>
-                  </a:txBody>
-                  <a:tcPr marL="91440" marR="91440" marT="45720" marB="45720" anchor="ctr">
-                    <a:lnL w="9525" cap="flat" cmpd="sng" algn="ctr">
-                      <a:solidFill>
-                        <a:srgbClr val="E4E9EF"/>
-                      </a:solidFill>
-                      <a:prstDash val="solid"/>
-                      <a:round/>
-                      <a:headEnd type="none" w="med" len="med"/>
-                      <a:tailEnd type="none" w="med" len="med"/>
-                    </a:lnL>
-                    <a:lnR w="9525" cap="flat" cmpd="sng" algn="ctr">
-                      <a:solidFill>
-                        <a:srgbClr val="E4E9EF"/>
-                      </a:solidFill>
-                      <a:prstDash val="solid"/>
-                      <a:round/>
-                      <a:headEnd type="none" w="med" len="med"/>
-                      <a:tailEnd type="none" w="med" len="med"/>
-                    </a:lnR>
-                    <a:lnT w="9525" cap="flat" cmpd="sng" algn="ctr">
-                      <a:solidFill>
-                        <a:srgbClr val="E4E9EF"/>
-                      </a:solidFill>
-                      <a:prstDash val="solid"/>
-                      <a:round/>
-                      <a:headEnd type="none" w="med" len="med"/>
-                      <a:tailEnd type="none" w="med" len="med"/>
-                    </a:lnT>
-                    <a:lnB w="9525" cap="flat" cmpd="sng" algn="ctr">
-                      <a:solidFill>
-                        <a:srgbClr val="E4E9EF"/>
-                      </a:solidFill>
-                      <a:prstDash val="solid"/>
-                      <a:round/>
-                      <a:headEnd type="none" w="med" len="med"/>
-                      <a:tailEnd type="none" w="med" len="med"/>
-                    </a:lnB>
-                    <a:solidFill>
-                      <a:srgbClr val="FFFFFF"/>
-                    </a:solidFill>
-                  </a:tcPr>
-                </a:tc>
-                <a:tc>
-                  <a:txBody>
-                    <a:bodyPr/>
-                    <a:lstStyle/>
-                    <a:p>
-                      <a:pPr algn="ctr" indent="0" marL="0">
-                        <a:buNone/>
-                      </a:pPr>
-                      <a:r>
-                        <a:rPr lang="en-US" sz="1050" dirty="0">
-                          <a:solidFill>
-                            <a:srgbClr val="1C2B3A"/>
-                          </a:solidFill>
-                          <a:latin typeface="Calibri" pitchFamily="34" charset="0"/>
-                          <a:ea typeface="Calibri" pitchFamily="34" charset="-122"/>
-                          <a:cs typeface="Calibri" pitchFamily="34" charset="-120"/>
-                        </a:rPr>
-                        <a:t>45 → 51 (ledger) · mkt 50.5</a:t>
-                      </a:r>
-                      <a:endParaRPr lang="en-US" sz="1050" dirty="0">
-                        <a:latin typeface="Calibri" charset="0"/>
-                        <a:ea typeface="Calibri" charset="0"/>
-                        <a:cs typeface="Calibri" charset="0"/>
-                      </a:endParaRPr>
-                    </a:p>
-                  </a:txBody>
-                  <a:tcPr marL="91440" marR="91440" marT="45720" marB="45720" anchor="ctr">
-                    <a:lnL w="9525" cap="flat" cmpd="sng" algn="ctr">
-                      <a:solidFill>
-                        <a:srgbClr val="E4E9EF"/>
-                      </a:solidFill>
-                      <a:prstDash val="solid"/>
-                      <a:round/>
-                      <a:headEnd type="none" w="med" len="med"/>
-                      <a:tailEnd type="none" w="med" len="med"/>
-                    </a:lnL>
-                    <a:lnR w="9525" cap="flat" cmpd="sng" algn="ctr">
-                      <a:solidFill>
-                        <a:srgbClr val="E4E9EF"/>
-                      </a:solidFill>
-                      <a:prstDash val="solid"/>
-                      <a:round/>
-                      <a:headEnd type="none" w="med" len="med"/>
-                      <a:tailEnd type="none" w="med" len="med"/>
-                    </a:lnR>
-                    <a:lnT w="9525" cap="flat" cmpd="sng" algn="ctr">
-                      <a:solidFill>
-                        <a:srgbClr val="E4E9EF"/>
-                      </a:solidFill>
-                      <a:prstDash val="solid"/>
-                      <a:round/>
-                      <a:headEnd type="none" w="med" len="med"/>
-                      <a:tailEnd type="none" w="med" len="med"/>
-                    </a:lnT>
-                    <a:lnB w="9525" cap="flat" cmpd="sng" algn="ctr">
-                      <a:solidFill>
-                        <a:srgbClr val="E4E9EF"/>
-                      </a:solidFill>
-                      <a:prstDash val="solid"/>
-                      <a:round/>
-                      <a:headEnd type="none" w="med" len="med"/>
-                      <a:tailEnd type="none" w="med" len="med"/>
-                    </a:lnB>
-                    <a:solidFill>
-                      <a:srgbClr val="FFFFFF"/>
-                    </a:solidFill>
-                  </a:tcPr>
-                </a:tc>
-                <a:tc>
-                  <a:txBody>
-                    <a:bodyPr/>
-                    <a:lstStyle/>
-                    <a:p>
-                      <a:pPr algn="ctr" indent="0" marL="0">
-                        <a:buNone/>
-                      </a:pPr>
-                      <a:r>
-                        <a:rPr lang="en-US" sz="1050" b="1" dirty="0">
-                          <a:solidFill>
-                            <a:srgbClr val="1E7A46"/>
-                          </a:solidFill>
-                          <a:latin typeface="Calibri" pitchFamily="34" charset="0"/>
-                          <a:ea typeface="Calibri" pitchFamily="34" charset="-122"/>
-                          <a:cs typeface="Calibri" pitchFamily="34" charset="-120"/>
-                        </a:rPr>
-                        <a:t>exact</a:t>
-                      </a:r>
-                      <a:endParaRPr lang="en-US" sz="1050" dirty="0">
-                        <a:latin typeface="Calibri" charset="0"/>
-                        <a:ea typeface="Calibri" charset="0"/>
-                        <a:cs typeface="Calibri" charset="0"/>
-                      </a:endParaRPr>
-                    </a:p>
-                  </a:txBody>
-                  <a:tcPr marL="91440" marR="91440" marT="45720" marB="45720" anchor="ctr">
-                    <a:lnL w="9525" cap="flat" cmpd="sng" algn="ctr">
-                      <a:solidFill>
-                        <a:srgbClr val="E4E9EF"/>
-                      </a:solidFill>
-                      <a:prstDash val="solid"/>
-                      <a:round/>
-                      <a:headEnd type="none" w="med" len="med"/>
-                      <a:tailEnd type="none" w="med" len="med"/>
-                    </a:lnL>
-                    <a:lnR w="9525" cap="flat" cmpd="sng" algn="ctr">
-                      <a:solidFill>
-                        <a:srgbClr val="E4E9EF"/>
-                      </a:solidFill>
-                      <a:prstDash val="solid"/>
-                      <a:round/>
-                      <a:headEnd type="none" w="med" len="med"/>
-                      <a:tailEnd type="none" w="med" len="med"/>
-                    </a:lnR>
-                    <a:lnT w="9525" cap="flat" cmpd="sng" algn="ctr">
-                      <a:solidFill>
-                        <a:srgbClr val="E4E9EF"/>
-                      </a:solidFill>
-                      <a:prstDash val="solid"/>
-                      <a:round/>
-                      <a:headEnd type="none" w="med" len="med"/>
-                      <a:tailEnd type="none" w="med" len="med"/>
-                    </a:lnT>
-                    <a:lnB w="9525" cap="flat" cmpd="sng" algn="ctr">
-                      <a:solidFill>
-                        <a:srgbClr val="E4E9EF"/>
-                      </a:solidFill>
-                      <a:prstDash val="solid"/>
-                      <a:round/>
-                      <a:headEnd type="none" w="med" len="med"/>
-                      <a:tailEnd type="none" w="med" len="med"/>
-                    </a:lnB>
-                    <a:solidFill>
-                      <a:srgbClr val="FFFFFF"/>
-                    </a:solidFill>
-                  </a:tcPr>
-                </a:tc>
-              </a:tr>
-              <a:tr h="310896">
-                <a:tc>
-                  <a:txBody>
-                    <a:bodyPr/>
-                    <a:lstStyle/>
-                    <a:p>
-                      <a:pPr indent="0" marL="0">
-                        <a:buNone/>
-                      </a:pPr>
-                      <a:r>
-                        <a:rPr lang="en-US" sz="1050" dirty="0">
-                          <a:solidFill>
-                            <a:srgbClr val="1C2B3A"/>
-                          </a:solidFill>
-                          <a:latin typeface="Calibri" pitchFamily="34" charset="0"/>
-                          <a:ea typeface="Calibri" pitchFamily="34" charset="-122"/>
-                          <a:cs typeface="Calibri" pitchFamily="34" charset="-120"/>
-                        </a:rPr>
-                        <a:t>Maxey unassisted share (n=694) / league</a:t>
-                      </a:r>
-                      <a:endParaRPr lang="en-US" sz="1050" dirty="0">
-                        <a:latin typeface="Calibri" charset="0"/>
-                        <a:ea typeface="Calibri" charset="0"/>
-                        <a:cs typeface="Calibri" charset="0"/>
-                      </a:endParaRPr>
-                    </a:p>
-                  </a:txBody>
-                  <a:tcPr marL="91440" marR="91440" marT="45720" marB="45720" anchor="ctr">
-                    <a:lnL w="9525" cap="flat" cmpd="sng" algn="ctr">
-                      <a:solidFill>
-                        <a:srgbClr val="E4E9EF"/>
-                      </a:solidFill>
-                      <a:prstDash val="solid"/>
-                      <a:round/>
-                      <a:headEnd type="none" w="med" len="med"/>
-                      <a:tailEnd type="none" w="med" len="med"/>
-                    </a:lnL>
-                    <a:lnR w="9525" cap="flat" cmpd="sng" algn="ctr">
-                      <a:solidFill>
-                        <a:srgbClr val="E4E9EF"/>
-                      </a:solidFill>
-                      <a:prstDash val="solid"/>
-                      <a:round/>
-                      <a:headEnd type="none" w="med" len="med"/>
-                      <a:tailEnd type="none" w="med" len="med"/>
-                    </a:lnR>
-                    <a:lnT w="9525" cap="flat" cmpd="sng" algn="ctr">
-                      <a:solidFill>
-                        <a:srgbClr val="E4E9EF"/>
-                      </a:solidFill>
-                      <a:prstDash val="solid"/>
-                      <a:round/>
-                      <a:headEnd type="none" w="med" len="med"/>
-                      <a:tailEnd type="none" w="med" len="med"/>
-                    </a:lnT>
-                    <a:lnB w="9525" cap="flat" cmpd="sng" algn="ctr">
-                      <a:solidFill>
-                        <a:srgbClr val="E4E9EF"/>
-                      </a:solidFill>
-                      <a:prstDash val="solid"/>
-                      <a:round/>
-                      <a:headEnd type="none" w="med" len="med"/>
-                      <a:tailEnd type="none" w="med" len="med"/>
-                    </a:lnB>
-                    <a:solidFill>
-                      <a:srgbClr val="FFFFFF"/>
-                    </a:solidFill>
-                  </a:tcPr>
-                </a:tc>
-                <a:tc>
-                  <a:txBody>
-                    <a:bodyPr/>
-                    <a:lstStyle/>
-                    <a:p>
-                      <a:pPr algn="ctr" indent="0" marL="0">
-                        <a:buNone/>
-                      </a:pPr>
-                      <a:r>
-                        <a:rPr lang="en-US" sz="1050" dirty="0">
-                          <a:solidFill>
-                            <a:srgbClr val="1C2B3A"/>
-                          </a:solidFill>
-                          <a:latin typeface="Calibri" pitchFamily="34" charset="0"/>
-                          <a:ea typeface="Calibri" pitchFamily="34" charset="-122"/>
-                          <a:cs typeface="Calibri" pitchFamily="34" charset="-120"/>
-                        </a:rPr>
-                        <a:t>55% / 36%</a:t>
-                      </a:r>
-                      <a:endParaRPr lang="en-US" sz="1050" dirty="0">
-                        <a:latin typeface="Calibri" charset="0"/>
-                        <a:ea typeface="Calibri" charset="0"/>
-                        <a:cs typeface="Calibri" charset="0"/>
-                      </a:endParaRPr>
-                    </a:p>
-                  </a:txBody>
-                  <a:tcPr marL="91440" marR="91440" marT="45720" marB="45720" anchor="ctr">
-                    <a:lnL w="9525" cap="flat" cmpd="sng" algn="ctr">
-                      <a:solidFill>
-                        <a:srgbClr val="E4E9EF"/>
-                      </a:solidFill>
-                      <a:prstDash val="solid"/>
-                      <a:round/>
-                      <a:headEnd type="none" w="med" len="med"/>
-                      <a:tailEnd type="none" w="med" len="med"/>
-                    </a:lnL>
-                    <a:lnR w="9525" cap="flat" cmpd="sng" algn="ctr">
-                      <a:solidFill>
-                        <a:srgbClr val="E4E9EF"/>
-                      </a:solidFill>
-                      <a:prstDash val="solid"/>
-                      <a:round/>
-                      <a:headEnd type="none" w="med" len="med"/>
-                      <a:tailEnd type="none" w="med" len="med"/>
-                    </a:lnR>
-                    <a:lnT w="9525" cap="flat" cmpd="sng" algn="ctr">
-                      <a:solidFill>
-                        <a:srgbClr val="E4E9EF"/>
-                      </a:solidFill>
-                      <a:prstDash val="solid"/>
-                      <a:round/>
-                      <a:headEnd type="none" w="med" len="med"/>
-                      <a:tailEnd type="none" w="med" len="med"/>
-                    </a:lnT>
-                    <a:lnB w="9525" cap="flat" cmpd="sng" algn="ctr">
-                      <a:solidFill>
-                        <a:srgbClr val="E4E9EF"/>
-                      </a:solidFill>
-                      <a:prstDash val="solid"/>
-                      <a:round/>
-                      <a:headEnd type="none" w="med" len="med"/>
-                      <a:tailEnd type="none" w="med" len="med"/>
-                    </a:lnB>
-                    <a:solidFill>
-                      <a:srgbClr val="FFFFFF"/>
-                    </a:solidFill>
-                  </a:tcPr>
-                </a:tc>
-                <a:tc>
-                  <a:txBody>
-                    <a:bodyPr/>
-                    <a:lstStyle/>
-                    <a:p>
-                      <a:pPr algn="ctr" indent="0" marL="0">
-                        <a:buNone/>
-                      </a:pPr>
-                      <a:r>
-                        <a:rPr lang="en-US" sz="1050" dirty="0">
-                          <a:solidFill>
-                            <a:srgbClr val="1C2B3A"/>
-                          </a:solidFill>
-                          <a:latin typeface="Calibri" pitchFamily="34" charset="0"/>
-                          <a:ea typeface="Calibri" pitchFamily="34" charset="-122"/>
-                          <a:cs typeface="Calibri" pitchFamily="34" charset="-120"/>
-                        </a:rPr>
-                        <a:t>55.3% / 36.3%</a:t>
-                      </a:r>
-                      <a:endParaRPr lang="en-US" sz="1050" dirty="0">
-                        <a:latin typeface="Calibri" charset="0"/>
-                        <a:ea typeface="Calibri" charset="0"/>
-                        <a:cs typeface="Calibri" charset="0"/>
-                      </a:endParaRPr>
-                    </a:p>
-                  </a:txBody>
-                  <a:tcPr marL="91440" marR="91440" marT="45720" marB="45720" anchor="ctr">
-                    <a:lnL w="9525" cap="flat" cmpd="sng" algn="ctr">
-                      <a:solidFill>
-                        <a:srgbClr val="E4E9EF"/>
-                      </a:solidFill>
-                      <a:prstDash val="solid"/>
-                      <a:round/>
-                      <a:headEnd type="none" w="med" len="med"/>
-                      <a:tailEnd type="none" w="med" len="med"/>
-                    </a:lnL>
-                    <a:lnR w="9525" cap="flat" cmpd="sng" algn="ctr">
-                      <a:solidFill>
-                        <a:srgbClr val="E4E9EF"/>
-                      </a:solidFill>
-                      <a:prstDash val="solid"/>
-                      <a:round/>
-                      <a:headEnd type="none" w="med" len="med"/>
-                      <a:tailEnd type="none" w="med" len="med"/>
-                    </a:lnR>
-                    <a:lnT w="9525" cap="flat" cmpd="sng" algn="ctr">
-                      <a:solidFill>
-                        <a:srgbClr val="E4E9EF"/>
-                      </a:solidFill>
-                      <a:prstDash val="solid"/>
-                      <a:round/>
-                      <a:headEnd type="none" w="med" len="med"/>
-                      <a:tailEnd type="none" w="med" len="med"/>
-                    </a:lnT>
-                    <a:lnB w="9525" cap="flat" cmpd="sng" algn="ctr">
-                      <a:solidFill>
-                        <a:srgbClr val="E4E9EF"/>
-                      </a:solidFill>
-                      <a:prstDash val="solid"/>
-                      <a:round/>
-                      <a:headEnd type="none" w="med" len="med"/>
-                      <a:tailEnd type="none" w="med" len="med"/>
-                    </a:lnB>
-                    <a:solidFill>
-                      <a:srgbClr val="FFFFFF"/>
-                    </a:solidFill>
-                  </a:tcPr>
-                </a:tc>
-                <a:tc>
-                  <a:txBody>
-                    <a:bodyPr/>
-                    <a:lstStyle/>
-                    <a:p>
-                      <a:pPr algn="ctr" indent="0" marL="0">
-                        <a:buNone/>
-                      </a:pPr>
-                      <a:r>
-                        <a:rPr lang="en-US" sz="1050" b="1" dirty="0">
-                          <a:solidFill>
-                            <a:srgbClr val="1E7A46"/>
-                          </a:solidFill>
-                          <a:latin typeface="Calibri" pitchFamily="34" charset="0"/>
-                          <a:ea typeface="Calibri" pitchFamily="34" charset="-122"/>
-                          <a:cs typeface="Calibri" pitchFamily="34" charset="-120"/>
-                        </a:rPr>
-                        <a:t>exact</a:t>
-                      </a:r>
-                      <a:endParaRPr lang="en-US" sz="1050" dirty="0">
-                        <a:latin typeface="Calibri" charset="0"/>
-                        <a:ea typeface="Calibri" charset="0"/>
-                        <a:cs typeface="Calibri" charset="0"/>
-                      </a:endParaRPr>
-                    </a:p>
-                  </a:txBody>
-                  <a:tcPr marL="91440" marR="91440" marT="45720" marB="45720" anchor="ctr">
-                    <a:lnL w="9525" cap="flat" cmpd="sng" algn="ctr">
-                      <a:solidFill>
-                        <a:srgbClr val="E4E9EF"/>
-                      </a:solidFill>
-                      <a:prstDash val="solid"/>
-                      <a:round/>
-                      <a:headEnd type="none" w="med" len="med"/>
-                      <a:tailEnd type="none" w="med" len="med"/>
-                    </a:lnL>
-                    <a:lnR w="9525" cap="flat" cmpd="sng" algn="ctr">
-                      <a:solidFill>
-                        <a:srgbClr val="E4E9EF"/>
-                      </a:solidFill>
-                      <a:prstDash val="solid"/>
-                      <a:round/>
-                      <a:headEnd type="none" w="med" len="med"/>
-                      <a:tailEnd type="none" w="med" len="med"/>
-                    </a:lnR>
-                    <a:lnT w="9525" cap="flat" cmpd="sng" algn="ctr">
-                      <a:solidFill>
-                        <a:srgbClr val="E4E9EF"/>
-                      </a:solidFill>
-                      <a:prstDash val="solid"/>
-                      <a:round/>
-                      <a:headEnd type="none" w="med" len="med"/>
-                      <a:tailEnd type="none" w="med" len="med"/>
-                    </a:lnT>
-                    <a:lnB w="9525" cap="flat" cmpd="sng" algn="ctr">
-                      <a:solidFill>
-                        <a:srgbClr val="E4E9EF"/>
-                      </a:solidFill>
-                      <a:prstDash val="solid"/>
-                      <a:round/>
-                      <a:headEnd type="none" w="med" len="med"/>
-                      <a:tailEnd type="none" w="med" len="med"/>
-                    </a:lnB>
-                    <a:solidFill>
-                      <a:srgbClr val="FFFFFF"/>
-                    </a:solidFill>
-                  </a:tcPr>
-                </a:tc>
-              </a:tr>
-              <a:tr h="310896">
-                <a:tc>
-                  <a:txBody>
-                    <a:bodyPr/>
-                    <a:lstStyle/>
-                    <a:p>
-                      <a:pPr indent="0" marL="0">
-                        <a:buNone/>
-                      </a:pPr>
-                      <a:r>
-                        <a:rPr lang="en-US" sz="1050" dirty="0">
-                          <a:solidFill>
-                            <a:srgbClr val="1C2B3A"/>
-                          </a:solidFill>
-                          <a:latin typeface="Calibri" pitchFamily="34" charset="0"/>
-                          <a:ea typeface="Calibri" pitchFamily="34" charset="-122"/>
-                          <a:cs typeface="Calibri" pitchFamily="34" charset="-120"/>
-                        </a:rPr>
-                        <a:t>Maxey projected with LeBron</a:t>
-                      </a:r>
-                      <a:endParaRPr lang="en-US" sz="1050" dirty="0">
-                        <a:latin typeface="Calibri" charset="0"/>
-                        <a:ea typeface="Calibri" charset="0"/>
-                        <a:cs typeface="Calibri" charset="0"/>
-                      </a:endParaRPr>
-                    </a:p>
-                  </a:txBody>
-                  <a:tcPr marL="91440" marR="91440" marT="45720" marB="45720" anchor="ctr">
-                    <a:lnL w="9525" cap="flat" cmpd="sng" algn="ctr">
-                      <a:solidFill>
-                        <a:srgbClr val="E4E9EF"/>
-                      </a:solidFill>
-                      <a:prstDash val="solid"/>
-                      <a:round/>
-                      <a:headEnd type="none" w="med" len="med"/>
-                      <a:tailEnd type="none" w="med" len="med"/>
-                    </a:lnL>
-                    <a:lnR w="9525" cap="flat" cmpd="sng" algn="ctr">
-                      <a:solidFill>
-                        <a:srgbClr val="E4E9EF"/>
-                      </a:solidFill>
-                      <a:prstDash val="solid"/>
-                      <a:round/>
-                      <a:headEnd type="none" w="med" len="med"/>
-                      <a:tailEnd type="none" w="med" len="med"/>
-                    </a:lnR>
-                    <a:lnT w="9525" cap="flat" cmpd="sng" algn="ctr">
-                      <a:solidFill>
-                        <a:srgbClr val="E4E9EF"/>
-                      </a:solidFill>
-                      <a:prstDash val="solid"/>
-                      <a:round/>
-                      <a:headEnd type="none" w="med" len="med"/>
-                      <a:tailEnd type="none" w="med" len="med"/>
-                    </a:lnT>
-                    <a:lnB w="9525" cap="flat" cmpd="sng" algn="ctr">
-                      <a:solidFill>
-                        <a:srgbClr val="E4E9EF"/>
-                      </a:solidFill>
-                      <a:prstDash val="solid"/>
-                      <a:round/>
-                      <a:headEnd type="none" w="med" len="med"/>
-                      <a:tailEnd type="none" w="med" len="med"/>
-                    </a:lnB>
-                    <a:solidFill>
-                      <a:srgbClr val="FFFFFF"/>
-                    </a:solidFill>
-                  </a:tcPr>
-                </a:tc>
-                <a:tc>
-                  <a:txBody>
-                    <a:bodyPr/>
-                    <a:lstStyle/>
-                    <a:p>
-                      <a:pPr algn="ctr" indent="0" marL="0">
-                        <a:buNone/>
-                      </a:pPr>
-                      <a:r>
-                        <a:rPr lang="en-US" sz="1050" dirty="0">
-                          <a:solidFill>
-                            <a:srgbClr val="1C2B3A"/>
-                          </a:solidFill>
-                          <a:latin typeface="Calibri" pitchFamily="34" charset="0"/>
-                          <a:ea typeface="Calibri" pitchFamily="34" charset="-122"/>
-                          <a:cs typeface="Calibri" pitchFamily="34" charset="-120"/>
-                        </a:rPr>
-                        <a:t>45%</a:t>
-                      </a:r>
-                      <a:endParaRPr lang="en-US" sz="1050" dirty="0">
-                        <a:latin typeface="Calibri" charset="0"/>
-                        <a:ea typeface="Calibri" charset="0"/>
-                        <a:cs typeface="Calibri" charset="0"/>
-                      </a:endParaRPr>
-                    </a:p>
-                  </a:txBody>
-                  <a:tcPr marL="91440" marR="91440" marT="45720" marB="45720" anchor="ctr">
-                    <a:lnL w="9525" cap="flat" cmpd="sng" algn="ctr">
-                      <a:solidFill>
-                        <a:srgbClr val="E4E9EF"/>
-                      </a:solidFill>
-                      <a:prstDash val="solid"/>
-                      <a:round/>
-                      <a:headEnd type="none" w="med" len="med"/>
-                      <a:tailEnd type="none" w="med" len="med"/>
-                    </a:lnL>
-                    <a:lnR w="9525" cap="flat" cmpd="sng" algn="ctr">
-                      <a:solidFill>
-                        <a:srgbClr val="E4E9EF"/>
-                      </a:solidFill>
-                      <a:prstDash val="solid"/>
-                      <a:round/>
-                      <a:headEnd type="none" w="med" len="med"/>
-                      <a:tailEnd type="none" w="med" len="med"/>
-                    </a:lnR>
-                    <a:lnT w="9525" cap="flat" cmpd="sng" algn="ctr">
-                      <a:solidFill>
-                        <a:srgbClr val="E4E9EF"/>
-                      </a:solidFill>
-                      <a:prstDash val="solid"/>
-                      <a:round/>
-                      <a:headEnd type="none" w="med" len="med"/>
-                      <a:tailEnd type="none" w="med" len="med"/>
-                    </a:lnT>
-                    <a:lnB w="9525" cap="flat" cmpd="sng" algn="ctr">
-                      <a:solidFill>
-                        <a:srgbClr val="E4E9EF"/>
-                      </a:solidFill>
-                      <a:prstDash val="solid"/>
-                      <a:round/>
-                      <a:headEnd type="none" w="med" len="med"/>
-                      <a:tailEnd type="none" w="med" len="med"/>
-                    </a:lnB>
-                    <a:solidFill>
-                      <a:srgbClr val="FFFFFF"/>
-                    </a:solidFill>
-                  </a:tcPr>
-                </a:tc>
-                <a:tc>
-                  <a:txBody>
-                    <a:bodyPr/>
-                    <a:lstStyle/>
-                    <a:p>
-                      <a:pPr algn="ctr" indent="0" marL="0">
-                        <a:buNone/>
-                      </a:pPr>
-                      <a:r>
-                        <a:rPr lang="en-US" sz="1050" dirty="0">
-                          <a:solidFill>
-                            <a:srgbClr val="1C2B3A"/>
-                          </a:solidFill>
-                          <a:latin typeface="Calibri" pitchFamily="34" charset="0"/>
-                          <a:ea typeface="Calibri" pitchFamily="34" charset="-122"/>
-                          <a:cs typeface="Calibri" pitchFamily="34" charset="-120"/>
-                        </a:rPr>
-                        <a:t>46.9% (range 43-54)</a:t>
-                      </a:r>
-                      <a:endParaRPr lang="en-US" sz="1050" dirty="0">
-                        <a:latin typeface="Calibri" charset="0"/>
-                        <a:ea typeface="Calibri" charset="0"/>
-                        <a:cs typeface="Calibri" charset="0"/>
-                      </a:endParaRPr>
-                    </a:p>
-                  </a:txBody>
-                  <a:tcPr marL="91440" marR="91440" marT="45720" marB="45720" anchor="ctr">
-                    <a:lnL w="9525" cap="flat" cmpd="sng" algn="ctr">
-                      <a:solidFill>
-                        <a:srgbClr val="E4E9EF"/>
-                      </a:solidFill>
-                      <a:prstDash val="solid"/>
-                      <a:round/>
-                      <a:headEnd type="none" w="med" len="med"/>
-                      <a:tailEnd type="none" w="med" len="med"/>
-                    </a:lnL>
-                    <a:lnR w="9525" cap="flat" cmpd="sng" algn="ctr">
-                      <a:solidFill>
-                        <a:srgbClr val="E4E9EF"/>
-                      </a:solidFill>
-                      <a:prstDash val="solid"/>
-                      <a:round/>
-                      <a:headEnd type="none" w="med" len="med"/>
-                      <a:tailEnd type="none" w="med" len="med"/>
-                    </a:lnR>
-                    <a:lnT w="9525" cap="flat" cmpd="sng" algn="ctr">
-                      <a:solidFill>
-                        <a:srgbClr val="E4E9EF"/>
-                      </a:solidFill>
-                      <a:prstDash val="solid"/>
-                      <a:round/>
-                      <a:headEnd type="none" w="med" len="med"/>
-                      <a:tailEnd type="none" w="med" len="med"/>
-                    </a:lnT>
-                    <a:lnB w="9525" cap="flat" cmpd="sng" algn="ctr">
-                      <a:solidFill>
-                        <a:srgbClr val="E4E9EF"/>
-                      </a:solidFill>
-                      <a:prstDash val="solid"/>
-                      <a:round/>
-                      <a:headEnd type="none" w="med" len="med"/>
-                      <a:tailEnd type="none" w="med" len="med"/>
-                    </a:lnB>
-                    <a:solidFill>
-                      <a:srgbClr val="FFFFFF"/>
-                    </a:solidFill>
-                  </a:tcPr>
-                </a:tc>
-                <a:tc>
-                  <a:txBody>
-                    <a:bodyPr/>
-                    <a:lstStyle/>
-                    <a:p>
-                      <a:pPr algn="ctr" indent="0" marL="0">
-                        <a:buNone/>
-                      </a:pPr>
-                      <a:r>
-                        <a:rPr lang="en-US" sz="1050" b="1" dirty="0">
-                          <a:solidFill>
-                            <a:srgbClr val="1E7A46"/>
-                          </a:solidFill>
-                          <a:latin typeface="Calibri" pitchFamily="34" charset="0"/>
-                          <a:ea typeface="Calibri" pitchFamily="34" charset="-122"/>
-                          <a:cs typeface="Calibri" pitchFamily="34" charset="-120"/>
-                        </a:rPr>
-                        <a:t>close</a:t>
-                      </a:r>
-                      <a:endParaRPr lang="en-US" sz="1050" dirty="0">
-                        <a:latin typeface="Calibri" charset="0"/>
-                        <a:ea typeface="Calibri" charset="0"/>
-                        <a:cs typeface="Calibri" charset="0"/>
-                      </a:endParaRPr>
-                    </a:p>
-                  </a:txBody>
-                  <a:tcPr marL="91440" marR="91440" marT="45720" marB="45720" anchor="ctr">
-                    <a:lnL w="9525" cap="flat" cmpd="sng" algn="ctr">
-                      <a:solidFill>
-                        <a:srgbClr val="E4E9EF"/>
-                      </a:solidFill>
-                      <a:prstDash val="solid"/>
-                      <a:round/>
-                      <a:headEnd type="none" w="med" len="med"/>
-                      <a:tailEnd type="none" w="med" len="med"/>
-                    </a:lnL>
-                    <a:lnR w="9525" cap="flat" cmpd="sng" algn="ctr">
-                      <a:solidFill>
-                        <a:srgbClr val="E4E9EF"/>
-                      </a:solidFill>
-                      <a:prstDash val="solid"/>
-                      <a:round/>
-                      <a:headEnd type="none" w="med" len="med"/>
-                      <a:tailEnd type="none" w="med" len="med"/>
-                    </a:lnR>
-                    <a:lnT w="9525" cap="flat" cmpd="sng" algn="ctr">
-                      <a:solidFill>
-                        <a:srgbClr val="E4E9EF"/>
-                      </a:solidFill>
-                      <a:prstDash val="solid"/>
-                      <a:round/>
-                      <a:headEnd type="none" w="med" len="med"/>
-                      <a:tailEnd type="none" w="med" len="med"/>
-                    </a:lnT>
-                    <a:lnB w="9525" cap="flat" cmpd="sng" algn="ctr">
-                      <a:solidFill>
-                        <a:srgbClr val="E4E9EF"/>
-                      </a:solidFill>
-                      <a:prstDash val="solid"/>
-                      <a:round/>
-                      <a:headEnd type="none" w="med" len="med"/>
-                      <a:tailEnd type="none" w="med" len="med"/>
-                    </a:lnB>
-                    <a:solidFill>
-                      <a:srgbClr val="FFFFFF"/>
-                    </a:solidFill>
-                  </a:tcPr>
-                </a:tc>
-              </a:tr>
-              <a:tr h="310896">
-                <a:tc>
-                  <a:txBody>
-                    <a:bodyPr/>
-                    <a:lstStyle/>
-                    <a:p>
-                      <a:pPr indent="0" marL="0">
-                        <a:buNone/>
-                      </a:pPr>
-                      <a:r>
-                        <a:rPr lang="en-US" sz="1050" dirty="0">
-                          <a:solidFill>
-                            <a:srgbClr val="1C2B3A"/>
-                          </a:solidFill>
-                          <a:latin typeface="Calibri" pitchFamily="34" charset="0"/>
-                          <a:ea typeface="Calibri" pitchFamily="34" charset="-122"/>
-                          <a:cs typeface="Calibri" pitchFamily="34" charset="-120"/>
-                        </a:rPr>
-                        <a:t>Brown assisted, 2025-26 / 2023-24</a:t>
-                      </a:r>
-                      <a:endParaRPr lang="en-US" sz="1050" dirty="0">
-                        <a:latin typeface="Calibri" charset="0"/>
-                        <a:ea typeface="Calibri" charset="0"/>
-                        <a:cs typeface="Calibri" charset="0"/>
-                      </a:endParaRPr>
-                    </a:p>
-                  </a:txBody>
-                  <a:tcPr marL="91440" marR="91440" marT="45720" marB="45720" anchor="ctr">
-                    <a:lnL w="9525" cap="flat" cmpd="sng" algn="ctr">
-                      <a:solidFill>
-                        <a:srgbClr val="E4E9EF"/>
-                      </a:solidFill>
-                      <a:prstDash val="solid"/>
-                      <a:round/>
-                      <a:headEnd type="none" w="med" len="med"/>
-                      <a:tailEnd type="none" w="med" len="med"/>
-                    </a:lnL>
-                    <a:lnR w="9525" cap="flat" cmpd="sng" algn="ctr">
-                      <a:solidFill>
-                        <a:srgbClr val="E4E9EF"/>
-                      </a:solidFill>
-                      <a:prstDash val="solid"/>
-                      <a:round/>
-                      <a:headEnd type="none" w="med" len="med"/>
-                      <a:tailEnd type="none" w="med" len="med"/>
-                    </a:lnR>
-                    <a:lnT w="9525" cap="flat" cmpd="sng" algn="ctr">
-                      <a:solidFill>
-                        <a:srgbClr val="E4E9EF"/>
-                      </a:solidFill>
-                      <a:prstDash val="solid"/>
-                      <a:round/>
-                      <a:headEnd type="none" w="med" len="med"/>
-                      <a:tailEnd type="none" w="med" len="med"/>
-                    </a:lnT>
-                    <a:lnB w="9525" cap="flat" cmpd="sng" algn="ctr">
-                      <a:solidFill>
-                        <a:srgbClr val="E4E9EF"/>
-                      </a:solidFill>
-                      <a:prstDash val="solid"/>
-                      <a:round/>
-                      <a:headEnd type="none" w="med" len="med"/>
-                      <a:tailEnd type="none" w="med" len="med"/>
-                    </a:lnB>
-                    <a:solidFill>
-                      <a:srgbClr val="FFFFFF"/>
-                    </a:solidFill>
-                  </a:tcPr>
-                </a:tc>
-                <a:tc>
-                  <a:txBody>
-                    <a:bodyPr/>
-                    <a:lstStyle/>
-                    <a:p>
-                      <a:pPr algn="ctr" indent="0" marL="0">
-                        <a:buNone/>
-                      </a:pPr>
-                      <a:r>
-                        <a:rPr lang="en-US" sz="1050" dirty="0">
-                          <a:solidFill>
-                            <a:srgbClr val="1C2B3A"/>
-                          </a:solidFill>
-                          <a:latin typeface="Calibri" pitchFamily="34" charset="0"/>
-                          <a:ea typeface="Calibri" pitchFamily="34" charset="-122"/>
-                          <a:cs typeface="Calibri" pitchFamily="34" charset="-120"/>
-                        </a:rPr>
-                        <a:t>36% / 46%</a:t>
-                      </a:r>
-                      <a:endParaRPr lang="en-US" sz="1050" dirty="0">
-                        <a:latin typeface="Calibri" charset="0"/>
-                        <a:ea typeface="Calibri" charset="0"/>
-                        <a:cs typeface="Calibri" charset="0"/>
-                      </a:endParaRPr>
-                    </a:p>
-                  </a:txBody>
-                  <a:tcPr marL="91440" marR="91440" marT="45720" marB="45720" anchor="ctr">
-                    <a:lnL w="9525" cap="flat" cmpd="sng" algn="ctr">
-                      <a:solidFill>
-                        <a:srgbClr val="E4E9EF"/>
-                      </a:solidFill>
-                      <a:prstDash val="solid"/>
-                      <a:round/>
-                      <a:headEnd type="none" w="med" len="med"/>
-                      <a:tailEnd type="none" w="med" len="med"/>
-                    </a:lnL>
-                    <a:lnR w="9525" cap="flat" cmpd="sng" algn="ctr">
-                      <a:solidFill>
-                        <a:srgbClr val="E4E9EF"/>
-                      </a:solidFill>
-                      <a:prstDash val="solid"/>
-                      <a:round/>
-                      <a:headEnd type="none" w="med" len="med"/>
-                      <a:tailEnd type="none" w="med" len="med"/>
-                    </a:lnR>
-                    <a:lnT w="9525" cap="flat" cmpd="sng" algn="ctr">
-                      <a:solidFill>
-                        <a:srgbClr val="E4E9EF"/>
-                      </a:solidFill>
-                      <a:prstDash val="solid"/>
-                      <a:round/>
-                      <a:headEnd type="none" w="med" len="med"/>
-                      <a:tailEnd type="none" w="med" len="med"/>
-                    </a:lnT>
-                    <a:lnB w="9525" cap="flat" cmpd="sng" algn="ctr">
-                      <a:solidFill>
-                        <a:srgbClr val="E4E9EF"/>
-                      </a:solidFill>
-                      <a:prstDash val="solid"/>
-                      <a:round/>
-                      <a:headEnd type="none" w="med" len="med"/>
-                      <a:tailEnd type="none" w="med" len="med"/>
-                    </a:lnB>
-                    <a:solidFill>
-                      <a:srgbClr val="FFFFFF"/>
-                    </a:solidFill>
-                  </a:tcPr>
-                </a:tc>
-                <a:tc>
-                  <a:txBody>
-                    <a:bodyPr/>
-                    <a:lstStyle/>
-                    <a:p>
-                      <a:pPr algn="ctr" indent="0" marL="0">
-                        <a:buNone/>
-                      </a:pPr>
-                      <a:r>
-                        <a:rPr lang="en-US" sz="1050" dirty="0">
-                          <a:solidFill>
-                            <a:srgbClr val="1C2B3A"/>
-                          </a:solidFill>
-                          <a:latin typeface="Calibri" pitchFamily="34" charset="0"/>
-                          <a:ea typeface="Calibri" pitchFamily="34" charset="-122"/>
-                          <a:cs typeface="Calibri" pitchFamily="34" charset="-120"/>
-                        </a:rPr>
-                        <a:t>36.4% / 47.6%</a:t>
-                      </a:r>
-                      <a:endParaRPr lang="en-US" sz="1050" dirty="0">
-                        <a:latin typeface="Calibri" charset="0"/>
-                        <a:ea typeface="Calibri" charset="0"/>
-                        <a:cs typeface="Calibri" charset="0"/>
-                      </a:endParaRPr>
-                    </a:p>
-                  </a:txBody>
-                  <a:tcPr marL="91440" marR="91440" marT="45720" marB="45720" anchor="ctr">
-                    <a:lnL w="9525" cap="flat" cmpd="sng" algn="ctr">
-                      <a:solidFill>
-                        <a:srgbClr val="E4E9EF"/>
-                      </a:solidFill>
-                      <a:prstDash val="solid"/>
-                      <a:round/>
-                      <a:headEnd type="none" w="med" len="med"/>
-                      <a:tailEnd type="none" w="med" len="med"/>
-                    </a:lnL>
-                    <a:lnR w="9525" cap="flat" cmpd="sng" algn="ctr">
-                      <a:solidFill>
-                        <a:srgbClr val="E4E9EF"/>
-                      </a:solidFill>
-                      <a:prstDash val="solid"/>
-                      <a:round/>
-                      <a:headEnd type="none" w="med" len="med"/>
-                      <a:tailEnd type="none" w="med" len="med"/>
-                    </a:lnR>
-                    <a:lnT w="9525" cap="flat" cmpd="sng" algn="ctr">
-                      <a:solidFill>
-                        <a:srgbClr val="E4E9EF"/>
-                      </a:solidFill>
-                      <a:prstDash val="solid"/>
-                      <a:round/>
-                      <a:headEnd type="none" w="med" len="med"/>
-                      <a:tailEnd type="none" w="med" len="med"/>
-                    </a:lnT>
-                    <a:lnB w="9525" cap="flat" cmpd="sng" algn="ctr">
-                      <a:solidFill>
-                        <a:srgbClr val="E4E9EF"/>
-                      </a:solidFill>
-                      <a:prstDash val="solid"/>
-                      <a:round/>
-                      <a:headEnd type="none" w="med" len="med"/>
-                      <a:tailEnd type="none" w="med" len="med"/>
-                    </a:lnB>
-                    <a:solidFill>
-                      <a:srgbClr val="FFFFFF"/>
-                    </a:solidFill>
-                  </a:tcPr>
-                </a:tc>
-                <a:tc>
-                  <a:txBody>
-                    <a:bodyPr/>
-                    <a:lstStyle/>
-                    <a:p>
-                      <a:pPr algn="ctr" indent="0" marL="0">
-                        <a:buNone/>
-                      </a:pPr>
-                      <a:r>
-                        <a:rPr lang="en-US" sz="1050" b="1" dirty="0">
-                          <a:solidFill>
-                            <a:srgbClr val="1E7A46"/>
-                          </a:solidFill>
-                          <a:latin typeface="Calibri" pitchFamily="34" charset="0"/>
-                          <a:ea typeface="Calibri" pitchFamily="34" charset="-122"/>
-                          <a:cs typeface="Calibri" pitchFamily="34" charset="-120"/>
-                        </a:rPr>
-                        <a:t>close</a:t>
-                      </a:r>
-                      <a:endParaRPr lang="en-US" sz="1050" dirty="0">
-                        <a:latin typeface="Calibri" charset="0"/>
-                        <a:ea typeface="Calibri" charset="0"/>
-                        <a:cs typeface="Calibri" charset="0"/>
-                      </a:endParaRPr>
-                    </a:p>
-                  </a:txBody>
-                  <a:tcPr marL="91440" marR="91440" marT="45720" marB="45720" anchor="ctr">
-                    <a:lnL w="9525" cap="flat" cmpd="sng" algn="ctr">
-                      <a:solidFill>
-                        <a:srgbClr val="E4E9EF"/>
-                      </a:solidFill>
-                      <a:prstDash val="solid"/>
-                      <a:round/>
-                      <a:headEnd type="none" w="med" len="med"/>
-                      <a:tailEnd type="none" w="med" len="med"/>
-                    </a:lnL>
-                    <a:lnR w="9525" cap="flat" cmpd="sng" algn="ctr">
-                      <a:solidFill>
-                        <a:srgbClr val="E4E9EF"/>
-                      </a:solidFill>
-                      <a:prstDash val="solid"/>
-                      <a:round/>
-                      <a:headEnd type="none" w="med" len="med"/>
-                      <a:tailEnd type="none" w="med" len="med"/>
-                    </a:lnR>
-                    <a:lnT w="9525" cap="flat" cmpd="sng" algn="ctr">
-                      <a:solidFill>
-                        <a:srgbClr val="E4E9EF"/>
-                      </a:solidFill>
-                      <a:prstDash val="solid"/>
-                      <a:round/>
-                      <a:headEnd type="none" w="med" len="med"/>
-                      <a:tailEnd type="none" w="med" len="med"/>
-                    </a:lnT>
-                    <a:lnB w="9525" cap="flat" cmpd="sng" algn="ctr">
-                      <a:solidFill>
-                        <a:srgbClr val="E4E9EF"/>
-                      </a:solidFill>
-                      <a:prstDash val="solid"/>
-                      <a:round/>
-                      <a:headEnd type="none" w="med" len="med"/>
-                      <a:tailEnd type="none" w="med" len="med"/>
-                    </a:lnB>
-                    <a:solidFill>
-                      <a:srgbClr val="FFFFFF"/>
-                    </a:solidFill>
-                  </a:tcPr>
-                </a:tc>
-              </a:tr>
-              <a:tr h="310896">
-                <a:tc>
-                  <a:txBody>
-                    <a:bodyPr/>
-                    <a:lstStyle/>
-                    <a:p>
-                      <a:pPr indent="0" marL="0">
-                        <a:buNone/>
-                      </a:pPr>
-                      <a:r>
-                        <a:rPr lang="en-US" sz="1050" dirty="0">
-                          <a:solidFill>
-                            <a:srgbClr val="1C2B3A"/>
-                          </a:solidFill>
-                          <a:latin typeface="Calibri" pitchFamily="34" charset="0"/>
-                          <a:ea typeface="Calibri" pitchFamily="34" charset="-122"/>
-                          <a:cs typeface="Calibri" pitchFamily="34" charset="-120"/>
-                        </a:rPr>
-                        <a:t>Brown projected with LeBron</a:t>
-                      </a:r>
-                      <a:endParaRPr lang="en-US" sz="1050" dirty="0">
-                        <a:latin typeface="Calibri" charset="0"/>
-                        <a:ea typeface="Calibri" charset="0"/>
-                        <a:cs typeface="Calibri" charset="0"/>
-                      </a:endParaRPr>
-                    </a:p>
-                  </a:txBody>
-                  <a:tcPr marL="91440" marR="91440" marT="45720" marB="45720" anchor="ctr">
-                    <a:lnL w="9525" cap="flat" cmpd="sng" algn="ctr">
-                      <a:solidFill>
-                        <a:srgbClr val="E4E9EF"/>
-                      </a:solidFill>
-                      <a:prstDash val="solid"/>
-                      <a:round/>
-                      <a:headEnd type="none" w="med" len="med"/>
-                      <a:tailEnd type="none" w="med" len="med"/>
-                    </a:lnL>
-                    <a:lnR w="9525" cap="flat" cmpd="sng" algn="ctr">
-                      <a:solidFill>
-                        <a:srgbClr val="E4E9EF"/>
-                      </a:solidFill>
-                      <a:prstDash val="solid"/>
-                      <a:round/>
-                      <a:headEnd type="none" w="med" len="med"/>
-                      <a:tailEnd type="none" w="med" len="med"/>
-                    </a:lnR>
-                    <a:lnT w="9525" cap="flat" cmpd="sng" algn="ctr">
-                      <a:solidFill>
-                        <a:srgbClr val="E4E9EF"/>
-                      </a:solidFill>
-                      <a:prstDash val="solid"/>
-                      <a:round/>
-                      <a:headEnd type="none" w="med" len="med"/>
-                      <a:tailEnd type="none" w="med" len="med"/>
-                    </a:lnT>
-                    <a:lnB w="9525" cap="flat" cmpd="sng" algn="ctr">
-                      <a:solidFill>
-                        <a:srgbClr val="E4E9EF"/>
-                      </a:solidFill>
-                      <a:prstDash val="solid"/>
-                      <a:round/>
-                      <a:headEnd type="none" w="med" len="med"/>
-                      <a:tailEnd type="none" w="med" len="med"/>
-                    </a:lnB>
-                    <a:solidFill>
-                      <a:srgbClr val="FFFFFF"/>
-                    </a:solidFill>
-                  </a:tcPr>
-                </a:tc>
-                <a:tc>
-                  <a:txBody>
-                    <a:bodyPr/>
-                    <a:lstStyle/>
-                    <a:p>
-                      <a:pPr algn="ctr" indent="0" marL="0">
-                        <a:buNone/>
-                      </a:pPr>
-                      <a:r>
-                        <a:rPr lang="en-US" sz="1050" dirty="0">
-                          <a:solidFill>
-                            <a:srgbClr val="1C2B3A"/>
-                          </a:solidFill>
-                          <a:latin typeface="Calibri" pitchFamily="34" charset="0"/>
-                          <a:ea typeface="Calibri" pitchFamily="34" charset="-122"/>
-                          <a:cs typeface="Calibri" pitchFamily="34" charset="-120"/>
-                        </a:rPr>
-                        <a:t>48%</a:t>
-                      </a:r>
-                      <a:endParaRPr lang="en-US" sz="1050" dirty="0">
-                        <a:latin typeface="Calibri" charset="0"/>
-                        <a:ea typeface="Calibri" charset="0"/>
-                        <a:cs typeface="Calibri" charset="0"/>
-                      </a:endParaRPr>
-                    </a:p>
-                  </a:txBody>
-                  <a:tcPr marL="91440" marR="91440" marT="45720" marB="45720" anchor="ctr">
-                    <a:lnL w="9525" cap="flat" cmpd="sng" algn="ctr">
-                      <a:solidFill>
-                        <a:srgbClr val="E4E9EF"/>
-                      </a:solidFill>
-                      <a:prstDash val="solid"/>
-                      <a:round/>
-                      <a:headEnd type="none" w="med" len="med"/>
-                      <a:tailEnd type="none" w="med" len="med"/>
-                    </a:lnL>
-                    <a:lnR w="9525" cap="flat" cmpd="sng" algn="ctr">
-                      <a:solidFill>
-                        <a:srgbClr val="E4E9EF"/>
-                      </a:solidFill>
-                      <a:prstDash val="solid"/>
-                      <a:round/>
-                      <a:headEnd type="none" w="med" len="med"/>
-                      <a:tailEnd type="none" w="med" len="med"/>
-                    </a:lnR>
-                    <a:lnT w="9525" cap="flat" cmpd="sng" algn="ctr">
-                      <a:solidFill>
-                        <a:srgbClr val="E4E9EF"/>
-                      </a:solidFill>
-                      <a:prstDash val="solid"/>
-                      <a:round/>
-                      <a:headEnd type="none" w="med" len="med"/>
-                      <a:tailEnd type="none" w="med" len="med"/>
-                    </a:lnT>
-                    <a:lnB w="9525" cap="flat" cmpd="sng" algn="ctr">
-                      <a:solidFill>
-                        <a:srgbClr val="E4E9EF"/>
-                      </a:solidFill>
-                      <a:prstDash val="solid"/>
-                      <a:round/>
-                      <a:headEnd type="none" w="med" len="med"/>
-                      <a:tailEnd type="none" w="med" len="med"/>
-                    </a:lnB>
-                    <a:solidFill>
-                      <a:srgbClr val="FFFFFF"/>
-                    </a:solidFill>
-                  </a:tcPr>
-                </a:tc>
-                <a:tc>
-                  <a:txBody>
-                    <a:bodyPr/>
-                    <a:lstStyle/>
-                    <a:p>
-                      <a:pPr algn="ctr" indent="0" marL="0">
-                        <a:buNone/>
-                      </a:pPr>
-                      <a:r>
-                        <a:rPr lang="en-US" sz="1050" dirty="0">
-                          <a:solidFill>
-                            <a:srgbClr val="1C2B3A"/>
-                          </a:solidFill>
-                          <a:latin typeface="Calibri" pitchFamily="34" charset="0"/>
-                          <a:ea typeface="Calibri" pitchFamily="34" charset="-122"/>
-                          <a:cs typeface="Calibri" pitchFamily="34" charset="-120"/>
-                        </a:rPr>
-                        <a:t>51.6%</a:t>
-                      </a:r>
-                      <a:endParaRPr lang="en-US" sz="1050" dirty="0">
-                        <a:latin typeface="Calibri" charset="0"/>
-                        <a:ea typeface="Calibri" charset="0"/>
-                        <a:cs typeface="Calibri" charset="0"/>
-                      </a:endParaRPr>
-                    </a:p>
-                  </a:txBody>
-                  <a:tcPr marL="91440" marR="91440" marT="45720" marB="45720" anchor="ctr">
-                    <a:lnL w="9525" cap="flat" cmpd="sng" algn="ctr">
-                      <a:solidFill>
-                        <a:srgbClr val="E4E9EF"/>
-                      </a:solidFill>
-                      <a:prstDash val="solid"/>
-                      <a:round/>
-                      <a:headEnd type="none" w="med" len="med"/>
-                      <a:tailEnd type="none" w="med" len="med"/>
-                    </a:lnL>
-                    <a:lnR w="9525" cap="flat" cmpd="sng" algn="ctr">
-                      <a:solidFill>
-                        <a:srgbClr val="E4E9EF"/>
-                      </a:solidFill>
-                      <a:prstDash val="solid"/>
-                      <a:round/>
-                      <a:headEnd type="none" w="med" len="med"/>
-                      <a:tailEnd type="none" w="med" len="med"/>
-                    </a:lnR>
-                    <a:lnT w="9525" cap="flat" cmpd="sng" algn="ctr">
-                      <a:solidFill>
-                        <a:srgbClr val="E4E9EF"/>
-                      </a:solidFill>
-                      <a:prstDash val="solid"/>
-                      <a:round/>
-                      <a:headEnd type="none" w="med" len="med"/>
-                      <a:tailEnd type="none" w="med" len="med"/>
-                    </a:lnT>
-                    <a:lnB w="9525" cap="flat" cmpd="sng" algn="ctr">
-                      <a:solidFill>
-                        <a:srgbClr val="E4E9EF"/>
-                      </a:solidFill>
-                      <a:prstDash val="solid"/>
-                      <a:round/>
-                      <a:headEnd type="none" w="med" len="med"/>
-                      <a:tailEnd type="none" w="med" len="med"/>
-                    </a:lnB>
-                    <a:solidFill>
-                      <a:srgbClr val="FFFFFF"/>
-                    </a:solidFill>
-                  </a:tcPr>
-                </a:tc>
-                <a:tc>
-                  <a:txBody>
-                    <a:bodyPr/>
-                    <a:lstStyle/>
-                    <a:p>
-                      <a:pPr algn="ctr" indent="0" marL="0">
-                        <a:buNone/>
-                      </a:pPr>
-                      <a:r>
-                        <a:rPr lang="en-US" sz="1050" b="1" dirty="0">
-                          <a:solidFill>
-                            <a:srgbClr val="1E7A46"/>
-                          </a:solidFill>
-                          <a:latin typeface="Calibri" pitchFamily="34" charset="0"/>
-                          <a:ea typeface="Calibri" pitchFamily="34" charset="-122"/>
-                          <a:cs typeface="Calibri" pitchFamily="34" charset="-120"/>
-                        </a:rPr>
-                        <a:t>close</a:t>
-                      </a:r>
-                      <a:endParaRPr lang="en-US" sz="1050" dirty="0">
-                        <a:latin typeface="Calibri" charset="0"/>
-                        <a:ea typeface="Calibri" charset="0"/>
-                        <a:cs typeface="Calibri" charset="0"/>
-                      </a:endParaRPr>
-                    </a:p>
-                  </a:txBody>
-                  <a:tcPr marL="91440" marR="91440" marT="45720" marB="45720" anchor="ctr">
-                    <a:lnL w="9525" cap="flat" cmpd="sng" algn="ctr">
-                      <a:solidFill>
-                        <a:srgbClr val="E4E9EF"/>
-                      </a:solidFill>
-                      <a:prstDash val="solid"/>
-                      <a:round/>
-                      <a:headEnd type="none" w="med" len="med"/>
-                      <a:tailEnd type="none" w="med" len="med"/>
-                    </a:lnL>
-                    <a:lnR w="9525" cap="flat" cmpd="sng" algn="ctr">
-                      <a:solidFill>
-                        <a:srgbClr val="E4E9EF"/>
-                      </a:solidFill>
-                      <a:prstDash val="solid"/>
-                      <a:round/>
-                      <a:headEnd type="none" w="med" len="med"/>
-                      <a:tailEnd type="none" w="med" len="med"/>
-                    </a:lnR>
-                    <a:lnT w="9525" cap="flat" cmpd="sng" algn="ctr">
-                      <a:solidFill>
-                        <a:srgbClr val="E4E9EF"/>
-                      </a:solidFill>
-                      <a:prstDash val="solid"/>
-                      <a:round/>
-                      <a:headEnd type="none" w="med" len="med"/>
-                      <a:tailEnd type="none" w="med" len="med"/>
-                    </a:lnT>
-                    <a:lnB w="9525" cap="flat" cmpd="sng" algn="ctr">
-                      <a:solidFill>
-                        <a:srgbClr val="E4E9EF"/>
-                      </a:solidFill>
-                      <a:prstDash val="solid"/>
-                      <a:round/>
-                      <a:headEnd type="none" w="med" len="med"/>
-                      <a:tailEnd type="none" w="med" len="med"/>
-                    </a:lnB>
-                    <a:solidFill>
-                      <a:srgbClr val="FFFFFF"/>
-                    </a:solidFill>
-                  </a:tcPr>
-                </a:tc>
-              </a:tr>
-              <a:tr h="310896">
-                <a:tc>
-                  <a:txBody>
-                    <a:bodyPr/>
-                    <a:lstStyle/>
-                    <a:p>
-                      <a:pPr indent="0" marL="0">
-                        <a:buNone/>
-                      </a:pPr>
-                      <a:r>
-                        <a:rPr lang="en-US" sz="1050" dirty="0">
-                          <a:solidFill>
-                            <a:srgbClr val="1C2B3A"/>
-                          </a:solidFill>
-                          <a:latin typeface="Calibri" pitchFamily="34" charset="0"/>
-                          <a:ea typeface="Calibri" pitchFamily="34" charset="-122"/>
-                          <a:cs typeface="Calibri" pitchFamily="34" charset="-120"/>
-                        </a:rPr>
-                        <a:t>LeBron usage / TS, 2025-26</a:t>
-                      </a:r>
-                      <a:endParaRPr lang="en-US" sz="1050" dirty="0">
-                        <a:latin typeface="Calibri" charset="0"/>
-                        <a:ea typeface="Calibri" charset="0"/>
-                        <a:cs typeface="Calibri" charset="0"/>
-                      </a:endParaRPr>
-                    </a:p>
-                  </a:txBody>
-                  <a:tcPr marL="91440" marR="91440" marT="45720" marB="45720" anchor="ctr">
-                    <a:lnL w="9525" cap="flat" cmpd="sng" algn="ctr">
-                      <a:solidFill>
-                        <a:srgbClr val="E4E9EF"/>
-                      </a:solidFill>
-                      <a:prstDash val="solid"/>
-                      <a:round/>
-                      <a:headEnd type="none" w="med" len="med"/>
-                      <a:tailEnd type="none" w="med" len="med"/>
-                    </a:lnL>
-                    <a:lnR w="9525" cap="flat" cmpd="sng" algn="ctr">
-                      <a:solidFill>
-                        <a:srgbClr val="E4E9EF"/>
-                      </a:solidFill>
-                      <a:prstDash val="solid"/>
-                      <a:round/>
-                      <a:headEnd type="none" w="med" len="med"/>
-                      <a:tailEnd type="none" w="med" len="med"/>
-                    </a:lnR>
-                    <a:lnT w="9525" cap="flat" cmpd="sng" algn="ctr">
-                      <a:solidFill>
-                        <a:srgbClr val="E4E9EF"/>
-                      </a:solidFill>
-                      <a:prstDash val="solid"/>
-                      <a:round/>
-                      <a:headEnd type="none" w="med" len="med"/>
-                      <a:tailEnd type="none" w="med" len="med"/>
-                    </a:lnT>
-                    <a:lnB w="9525" cap="flat" cmpd="sng" algn="ctr">
-                      <a:solidFill>
-                        <a:srgbClr val="E4E9EF"/>
-                      </a:solidFill>
-                      <a:prstDash val="solid"/>
-                      <a:round/>
-                      <a:headEnd type="none" w="med" len="med"/>
-                      <a:tailEnd type="none" w="med" len="med"/>
-                    </a:lnB>
-                    <a:solidFill>
-                      <a:srgbClr val="FFFFFF"/>
-                    </a:solidFill>
-                  </a:tcPr>
-                </a:tc>
-                <a:tc>
-                  <a:txBody>
-                    <a:bodyPr/>
-                    <a:lstStyle/>
-                    <a:p>
-                      <a:pPr algn="ctr" indent="0" marL="0">
-                        <a:buNone/>
-                      </a:pPr>
-                      <a:r>
-                        <a:rPr lang="en-US" sz="1050" dirty="0">
-                          <a:solidFill>
-                            <a:srgbClr val="1C2B3A"/>
-                          </a:solidFill>
-                          <a:latin typeface="Calibri" pitchFamily="34" charset="0"/>
-                          <a:ea typeface="Calibri" pitchFamily="34" charset="-122"/>
-                          <a:cs typeface="Calibri" pitchFamily="34" charset="-120"/>
-                        </a:rPr>
-                        <a:t>27.2% / .594</a:t>
-                      </a:r>
-                      <a:endParaRPr lang="en-US" sz="1050" dirty="0">
-                        <a:latin typeface="Calibri" charset="0"/>
-                        <a:ea typeface="Calibri" charset="0"/>
-                        <a:cs typeface="Calibri" charset="0"/>
-                      </a:endParaRPr>
-                    </a:p>
-                  </a:txBody>
-                  <a:tcPr marL="91440" marR="91440" marT="45720" marB="45720" anchor="ctr">
-                    <a:lnL w="9525" cap="flat" cmpd="sng" algn="ctr">
-                      <a:solidFill>
-                        <a:srgbClr val="E4E9EF"/>
-                      </a:solidFill>
-                      <a:prstDash val="solid"/>
-                      <a:round/>
-                      <a:headEnd type="none" w="med" len="med"/>
-                      <a:tailEnd type="none" w="med" len="med"/>
-                    </a:lnL>
-                    <a:lnR w="9525" cap="flat" cmpd="sng" algn="ctr">
-                      <a:solidFill>
-                        <a:srgbClr val="E4E9EF"/>
-                      </a:solidFill>
-                      <a:prstDash val="solid"/>
-                      <a:round/>
-                      <a:headEnd type="none" w="med" len="med"/>
-                      <a:tailEnd type="none" w="med" len="med"/>
-                    </a:lnR>
-                    <a:lnT w="9525" cap="flat" cmpd="sng" algn="ctr">
-                      <a:solidFill>
-                        <a:srgbClr val="E4E9EF"/>
-                      </a:solidFill>
-                      <a:prstDash val="solid"/>
-                      <a:round/>
-                      <a:headEnd type="none" w="med" len="med"/>
-                      <a:tailEnd type="none" w="med" len="med"/>
-                    </a:lnT>
-                    <a:lnB w="9525" cap="flat" cmpd="sng" algn="ctr">
-                      <a:solidFill>
-                        <a:srgbClr val="E4E9EF"/>
-                      </a:solidFill>
-                      <a:prstDash val="solid"/>
-                      <a:round/>
-                      <a:headEnd type="none" w="med" len="med"/>
-                      <a:tailEnd type="none" w="med" len="med"/>
-                    </a:lnB>
-                    <a:solidFill>
-                      <a:srgbClr val="FFFFFF"/>
-                    </a:solidFill>
-                  </a:tcPr>
-                </a:tc>
-                <a:tc>
-                  <a:txBody>
-                    <a:bodyPr/>
-                    <a:lstStyle/>
-                    <a:p>
-                      <a:pPr algn="ctr" indent="0" marL="0">
-                        <a:buNone/>
-                      </a:pPr>
-                      <a:r>
-                        <a:rPr lang="en-US" sz="1050" dirty="0">
-                          <a:solidFill>
-                            <a:srgbClr val="1C2B3A"/>
-                          </a:solidFill>
-                          <a:latin typeface="Calibri" pitchFamily="34" charset="0"/>
-                          <a:ea typeface="Calibri" pitchFamily="34" charset="-122"/>
-                          <a:cs typeface="Calibri" pitchFamily="34" charset="-120"/>
-                        </a:rPr>
-                        <a:t>27.2% / .594</a:t>
-                      </a:r>
-                      <a:endParaRPr lang="en-US" sz="1050" dirty="0">
-                        <a:latin typeface="Calibri" charset="0"/>
-                        <a:ea typeface="Calibri" charset="0"/>
-                        <a:cs typeface="Calibri" charset="0"/>
-                      </a:endParaRPr>
-                    </a:p>
-                  </a:txBody>
-                  <a:tcPr marL="91440" marR="91440" marT="45720" marB="45720" anchor="ctr">
-                    <a:lnL w="9525" cap="flat" cmpd="sng" algn="ctr">
-                      <a:solidFill>
-                        <a:srgbClr val="E4E9EF"/>
-                      </a:solidFill>
-                      <a:prstDash val="solid"/>
-                      <a:round/>
-                      <a:headEnd type="none" w="med" len="med"/>
-                      <a:tailEnd type="none" w="med" len="med"/>
-                    </a:lnL>
-                    <a:lnR w="9525" cap="flat" cmpd="sng" algn="ctr">
-                      <a:solidFill>
-                        <a:srgbClr val="E4E9EF"/>
-                      </a:solidFill>
-                      <a:prstDash val="solid"/>
-                      <a:round/>
-                      <a:headEnd type="none" w="med" len="med"/>
-                      <a:tailEnd type="none" w="med" len="med"/>
-                    </a:lnR>
-                    <a:lnT w="9525" cap="flat" cmpd="sng" algn="ctr">
-                      <a:solidFill>
-                        <a:srgbClr val="E4E9EF"/>
-                      </a:solidFill>
-                      <a:prstDash val="solid"/>
-                      <a:round/>
-                      <a:headEnd type="none" w="med" len="med"/>
-                      <a:tailEnd type="none" w="med" len="med"/>
-                    </a:lnT>
-                    <a:lnB w="9525" cap="flat" cmpd="sng" algn="ctr">
-                      <a:solidFill>
-                        <a:srgbClr val="E4E9EF"/>
-                      </a:solidFill>
-                      <a:prstDash val="solid"/>
-                      <a:round/>
-                      <a:headEnd type="none" w="med" len="med"/>
-                      <a:tailEnd type="none" w="med" len="med"/>
-                    </a:lnB>
-                    <a:solidFill>
-                      <a:srgbClr val="FFFFFF"/>
-                    </a:solidFill>
-                  </a:tcPr>
-                </a:tc>
-                <a:tc>
-                  <a:txBody>
-                    <a:bodyPr/>
-                    <a:lstStyle/>
-                    <a:p>
-                      <a:pPr algn="ctr" indent="0" marL="0">
-                        <a:buNone/>
-                      </a:pPr>
-                      <a:r>
-                        <a:rPr lang="en-US" sz="1050" b="1" dirty="0">
-                          <a:solidFill>
-                            <a:srgbClr val="1E7A46"/>
-                          </a:solidFill>
-                          <a:latin typeface="Calibri" pitchFamily="34" charset="0"/>
-                          <a:ea typeface="Calibri" pitchFamily="34" charset="-122"/>
-                          <a:cs typeface="Calibri" pitchFamily="34" charset="-120"/>
-                        </a:rPr>
-                        <a:t>exact</a:t>
-                      </a:r>
-                      <a:endParaRPr lang="en-US" sz="1050" dirty="0">
-                        <a:latin typeface="Calibri" charset="0"/>
-                        <a:ea typeface="Calibri" charset="0"/>
-                        <a:cs typeface="Calibri" charset="0"/>
-                      </a:endParaRPr>
-                    </a:p>
-                  </a:txBody>
-                  <a:tcPr marL="91440" marR="91440" marT="45720" marB="45720" anchor="ctr">
-                    <a:lnL w="9525" cap="flat" cmpd="sng" algn="ctr">
-                      <a:solidFill>
-                        <a:srgbClr val="E4E9EF"/>
-                      </a:solidFill>
-                      <a:prstDash val="solid"/>
-                      <a:round/>
-                      <a:headEnd type="none" w="med" len="med"/>
-                      <a:tailEnd type="none" w="med" len="med"/>
-                    </a:lnL>
-                    <a:lnR w="9525" cap="flat" cmpd="sng" algn="ctr">
-                      <a:solidFill>
-                        <a:srgbClr val="E4E9EF"/>
-                      </a:solidFill>
-                      <a:prstDash val="solid"/>
-                      <a:round/>
-                      <a:headEnd type="none" w="med" len="med"/>
-                      <a:tailEnd type="none" w="med" len="med"/>
-                    </a:lnR>
-                    <a:lnT w="9525" cap="flat" cmpd="sng" algn="ctr">
-                      <a:solidFill>
-                        <a:srgbClr val="E4E9EF"/>
-                      </a:solidFill>
-                      <a:prstDash val="solid"/>
-                      <a:round/>
-                      <a:headEnd type="none" w="med" len="med"/>
-                      <a:tailEnd type="none" w="med" len="med"/>
-                    </a:lnT>
-                    <a:lnB w="9525" cap="flat" cmpd="sng" algn="ctr">
-                      <a:solidFill>
-                        <a:srgbClr val="E4E9EF"/>
-                      </a:solidFill>
-                      <a:prstDash val="solid"/>
-                      <a:round/>
-                      <a:headEnd type="none" w="med" len="med"/>
-                      <a:tailEnd type="none" w="med" len="med"/>
-                    </a:lnB>
-                    <a:solidFill>
-                      <a:srgbClr val="FFFFFF"/>
-                    </a:solidFill>
-                  </a:tcPr>
-                </a:tc>
-              </a:tr>
-              <a:tr h="310896">
-                <a:tc>
-                  <a:txBody>
-                    <a:bodyPr/>
-                    <a:lstStyle/>
-                    <a:p>
-                      <a:pPr indent="0" marL="0">
-                        <a:buNone/>
-                      </a:pPr>
-                      <a:r>
-                        <a:rPr lang="en-US" sz="1050" dirty="0">
-                          <a:solidFill>
-                            <a:srgbClr val="1C2B3A"/>
-                          </a:solidFill>
-                          <a:latin typeface="Calibri" pitchFamily="34" charset="0"/>
-                          <a:ea typeface="Calibri" pitchFamily="34" charset="-122"/>
-                          <a:cs typeface="Calibri" pitchFamily="34" charset="-120"/>
-                        </a:rPr>
-                        <a:t>Embiid rim share of makes</a:t>
-                      </a:r>
-                      <a:endParaRPr lang="en-US" sz="1050" dirty="0">
-                        <a:latin typeface="Calibri" charset="0"/>
-                        <a:ea typeface="Calibri" charset="0"/>
-                        <a:cs typeface="Calibri" charset="0"/>
-                      </a:endParaRPr>
-                    </a:p>
-                  </a:txBody>
-                  <a:tcPr marL="91440" marR="91440" marT="45720" marB="45720" anchor="ctr">
-                    <a:lnL w="9525" cap="flat" cmpd="sng" algn="ctr">
-                      <a:solidFill>
-                        <a:srgbClr val="E4E9EF"/>
-                      </a:solidFill>
-                      <a:prstDash val="solid"/>
-                      <a:round/>
-                      <a:headEnd type="none" w="med" len="med"/>
-                      <a:tailEnd type="none" w="med" len="med"/>
-                    </a:lnL>
-                    <a:lnR w="9525" cap="flat" cmpd="sng" algn="ctr">
-                      <a:solidFill>
-                        <a:srgbClr val="E4E9EF"/>
-                      </a:solidFill>
-                      <a:prstDash val="solid"/>
-                      <a:round/>
-                      <a:headEnd type="none" w="med" len="med"/>
-                      <a:tailEnd type="none" w="med" len="med"/>
-                    </a:lnR>
-                    <a:lnT w="9525" cap="flat" cmpd="sng" algn="ctr">
-                      <a:solidFill>
-                        <a:srgbClr val="E4E9EF"/>
-                      </a:solidFill>
-                      <a:prstDash val="solid"/>
-                      <a:round/>
-                      <a:headEnd type="none" w="med" len="med"/>
-                      <a:tailEnd type="none" w="med" len="med"/>
-                    </a:lnT>
-                    <a:lnB w="9525" cap="flat" cmpd="sng" algn="ctr">
-                      <a:solidFill>
-                        <a:srgbClr val="E4E9EF"/>
-                      </a:solidFill>
-                      <a:prstDash val="solid"/>
-                      <a:round/>
-                      <a:headEnd type="none" w="med" len="med"/>
-                      <a:tailEnd type="none" w="med" len="med"/>
-                    </a:lnB>
-                    <a:solidFill>
-                      <a:srgbClr val="FFFFFF"/>
-                    </a:solidFill>
-                  </a:tcPr>
-                </a:tc>
-                <a:tc>
-                  <a:txBody>
-                    <a:bodyPr/>
-                    <a:lstStyle/>
-                    <a:p>
-                      <a:pPr algn="ctr" indent="0" marL="0">
-                        <a:buNone/>
-                      </a:pPr>
-                      <a:r>
-                        <a:rPr lang="en-US" sz="1050" dirty="0">
-                          <a:solidFill>
-                            <a:srgbClr val="1C2B3A"/>
-                          </a:solidFill>
-                          <a:latin typeface="Calibri" pitchFamily="34" charset="0"/>
-                          <a:ea typeface="Calibri" pitchFamily="34" charset="-122"/>
-                          <a:cs typeface="Calibri" pitchFamily="34" charset="-120"/>
-                        </a:rPr>
-                        <a:t>37%</a:t>
-                      </a:r>
-                      <a:endParaRPr lang="en-US" sz="1050" dirty="0">
-                        <a:latin typeface="Calibri" charset="0"/>
-                        <a:ea typeface="Calibri" charset="0"/>
-                        <a:cs typeface="Calibri" charset="0"/>
-                      </a:endParaRPr>
-                    </a:p>
-                  </a:txBody>
-                  <a:tcPr marL="91440" marR="91440" marT="45720" marB="45720" anchor="ctr">
-                    <a:lnL w="9525" cap="flat" cmpd="sng" algn="ctr">
-                      <a:solidFill>
-                        <a:srgbClr val="E4E9EF"/>
-                      </a:solidFill>
-                      <a:prstDash val="solid"/>
-                      <a:round/>
-                      <a:headEnd type="none" w="med" len="med"/>
-                      <a:tailEnd type="none" w="med" len="med"/>
-                    </a:lnL>
-                    <a:lnR w="9525" cap="flat" cmpd="sng" algn="ctr">
-                      <a:solidFill>
-                        <a:srgbClr val="E4E9EF"/>
-                      </a:solidFill>
-                      <a:prstDash val="solid"/>
-                      <a:round/>
-                      <a:headEnd type="none" w="med" len="med"/>
-                      <a:tailEnd type="none" w="med" len="med"/>
-                    </a:lnR>
-                    <a:lnT w="9525" cap="flat" cmpd="sng" algn="ctr">
-                      <a:solidFill>
-                        <a:srgbClr val="E4E9EF"/>
-                      </a:solidFill>
-                      <a:prstDash val="solid"/>
-                      <a:round/>
-                      <a:headEnd type="none" w="med" len="med"/>
-                      <a:tailEnd type="none" w="med" len="med"/>
-                    </a:lnT>
-                    <a:lnB w="9525" cap="flat" cmpd="sng" algn="ctr">
-                      <a:solidFill>
-                        <a:srgbClr val="E4E9EF"/>
-                      </a:solidFill>
-                      <a:prstDash val="solid"/>
-                      <a:round/>
-                      <a:headEnd type="none" w="med" len="med"/>
-                      <a:tailEnd type="none" w="med" len="med"/>
-                    </a:lnB>
-                    <a:solidFill>
-                      <a:srgbClr val="FFFFFF"/>
-                    </a:solidFill>
-                  </a:tcPr>
-                </a:tc>
-                <a:tc>
-                  <a:txBody>
-                    <a:bodyPr/>
-                    <a:lstStyle/>
-                    <a:p>
-                      <a:pPr algn="ctr" indent="0" marL="0">
-                        <a:buNone/>
-                      </a:pPr>
-                      <a:r>
-                        <a:rPr lang="en-US" sz="1050" dirty="0">
-                          <a:solidFill>
-                            <a:srgbClr val="1C2B3A"/>
-                          </a:solidFill>
-                          <a:latin typeface="Calibri" pitchFamily="34" charset="0"/>
-                          <a:ea typeface="Calibri" pitchFamily="34" charset="-122"/>
-                          <a:cs typeface="Calibri" pitchFamily="34" charset="-120"/>
-                        </a:rPr>
-                        <a:t>34.9% (pbpstats)</a:t>
-                      </a:r>
-                      <a:endParaRPr lang="en-US" sz="1050" dirty="0">
-                        <a:latin typeface="Calibri" charset="0"/>
-                        <a:ea typeface="Calibri" charset="0"/>
-                        <a:cs typeface="Calibri" charset="0"/>
-                      </a:endParaRPr>
-                    </a:p>
-                  </a:txBody>
-                  <a:tcPr marL="91440" marR="91440" marT="45720" marB="45720" anchor="ctr">
-                    <a:lnL w="9525" cap="flat" cmpd="sng" algn="ctr">
-                      <a:solidFill>
-                        <a:srgbClr val="E4E9EF"/>
-                      </a:solidFill>
-                      <a:prstDash val="solid"/>
-                      <a:round/>
-                      <a:headEnd type="none" w="med" len="med"/>
-                      <a:tailEnd type="none" w="med" len="med"/>
-                    </a:lnL>
-                    <a:lnR w="9525" cap="flat" cmpd="sng" algn="ctr">
-                      <a:solidFill>
-                        <a:srgbClr val="E4E9EF"/>
-                      </a:solidFill>
-                      <a:prstDash val="solid"/>
-                      <a:round/>
-                      <a:headEnd type="none" w="med" len="med"/>
-                      <a:tailEnd type="none" w="med" len="med"/>
-                    </a:lnR>
-                    <a:lnT w="9525" cap="flat" cmpd="sng" algn="ctr">
-                      <a:solidFill>
-                        <a:srgbClr val="E4E9EF"/>
-                      </a:solidFill>
-                      <a:prstDash val="solid"/>
-                      <a:round/>
-                      <a:headEnd type="none" w="med" len="med"/>
-                      <a:tailEnd type="none" w="med" len="med"/>
-                    </a:lnT>
-                    <a:lnB w="9525" cap="flat" cmpd="sng" algn="ctr">
-                      <a:solidFill>
-                        <a:srgbClr val="E4E9EF"/>
-                      </a:solidFill>
-                      <a:prstDash val="solid"/>
-                      <a:round/>
-                      <a:headEnd type="none" w="med" len="med"/>
-                      <a:tailEnd type="none" w="med" len="med"/>
-                    </a:lnB>
-                    <a:solidFill>
-                      <a:srgbClr val="FFFFFF"/>
-                    </a:solidFill>
-                  </a:tcPr>
-                </a:tc>
-                <a:tc>
-                  <a:txBody>
-                    <a:bodyPr/>
-                    <a:lstStyle/>
-                    <a:p>
-                      <a:pPr algn="ctr" indent="0" marL="0">
-                        <a:buNone/>
-                      </a:pPr>
-                      <a:r>
-                        <a:rPr lang="en-US" sz="1050" b="1" dirty="0">
-                          <a:solidFill>
-                            <a:srgbClr val="B07A00"/>
-                          </a:solidFill>
-                          <a:latin typeface="Calibri" pitchFamily="34" charset="0"/>
-                          <a:ea typeface="Calibri" pitchFamily="34" charset="-122"/>
-                          <a:cs typeface="Calibri" pitchFamily="34" charset="-120"/>
-                        </a:rPr>
-                        <a:t>off ~2</a:t>
-                      </a:r>
-                      <a:endParaRPr lang="en-US" sz="1050" dirty="0">
-                        <a:latin typeface="Calibri" charset="0"/>
-                        <a:ea typeface="Calibri" charset="0"/>
-                        <a:cs typeface="Calibri" charset="0"/>
-                      </a:endParaRPr>
-                    </a:p>
-                  </a:txBody>
-                  <a:tcPr marL="91440" marR="91440" marT="45720" marB="45720" anchor="ctr">
-                    <a:lnL w="9525" cap="flat" cmpd="sng" algn="ctr">
-                      <a:solidFill>
-                        <a:srgbClr val="E4E9EF"/>
-                      </a:solidFill>
-                      <a:prstDash val="solid"/>
-                      <a:round/>
-                      <a:headEnd type="none" w="med" len="med"/>
-                      <a:tailEnd type="none" w="med" len="med"/>
-                    </a:lnL>
-                    <a:lnR w="9525" cap="flat" cmpd="sng" algn="ctr">
-                      <a:solidFill>
-                        <a:srgbClr val="E4E9EF"/>
-                      </a:solidFill>
-                      <a:prstDash val="solid"/>
-                      <a:round/>
-                      <a:headEnd type="none" w="med" len="med"/>
-                      <a:tailEnd type="none" w="med" len="med"/>
-                    </a:lnR>
-                    <a:lnT w="9525" cap="flat" cmpd="sng" algn="ctr">
-                      <a:solidFill>
-                        <a:srgbClr val="E4E9EF"/>
-                      </a:solidFill>
-                      <a:prstDash val="solid"/>
-                      <a:round/>
-                      <a:headEnd type="none" w="med" len="med"/>
-                      <a:tailEnd type="none" w="med" len="med"/>
-                    </a:lnT>
-                    <a:lnB w="9525" cap="flat" cmpd="sng" algn="ctr">
-                      <a:solidFill>
-                        <a:srgbClr val="E4E9EF"/>
-                      </a:solidFill>
-                      <a:prstDash val="solid"/>
-                      <a:round/>
-                      <a:headEnd type="none" w="med" len="med"/>
-                      <a:tailEnd type="none" w="med" len="med"/>
-                    </a:lnB>
-                    <a:solidFill>
-                      <a:srgbClr val="FFFFFF"/>
-                    </a:solidFill>
-                  </a:tcPr>
-                </a:tc>
-              </a:tr>
-              <a:tr h="310896">
-                <a:tc>
-                  <a:txBody>
-                    <a:bodyPr/>
-                    <a:lstStyle/>
-                    <a:p>
-                      <a:pPr indent="0" marL="0">
-                        <a:buNone/>
-                      </a:pPr>
-                      <a:r>
-                        <a:rPr lang="en-US" sz="1050" dirty="0">
-                          <a:solidFill>
-                            <a:srgbClr val="1C2B3A"/>
-                          </a:solidFill>
-                          <a:latin typeface="Calibri" pitchFamily="34" charset="0"/>
-                          <a:ea typeface="Calibri" pitchFamily="34" charset="-122"/>
-                          <a:cs typeface="Calibri" pitchFamily="34" charset="-120"/>
-                        </a:rPr>
-                        <a:t>“52% of LeBron’s 765 assists at rim”</a:t>
-                      </a:r>
-                      <a:endParaRPr lang="en-US" sz="1050" dirty="0">
-                        <a:latin typeface="Calibri" charset="0"/>
-                        <a:ea typeface="Calibri" charset="0"/>
-                        <a:cs typeface="Calibri" charset="0"/>
-                      </a:endParaRPr>
-                    </a:p>
-                  </a:txBody>
-                  <a:tcPr marL="91440" marR="91440" marT="45720" marB="45720" anchor="ctr">
-                    <a:lnL w="9525" cap="flat" cmpd="sng" algn="ctr">
-                      <a:solidFill>
-                        <a:srgbClr val="E4E9EF"/>
-                      </a:solidFill>
-                      <a:prstDash val="solid"/>
-                      <a:round/>
-                      <a:headEnd type="none" w="med" len="med"/>
-                      <a:tailEnd type="none" w="med" len="med"/>
-                    </a:lnL>
-                    <a:lnR w="9525" cap="flat" cmpd="sng" algn="ctr">
-                      <a:solidFill>
-                        <a:srgbClr val="E4E9EF"/>
-                      </a:solidFill>
-                      <a:prstDash val="solid"/>
-                      <a:round/>
-                      <a:headEnd type="none" w="med" len="med"/>
-                      <a:tailEnd type="none" w="med" len="med"/>
-                    </a:lnR>
-                    <a:lnT w="9525" cap="flat" cmpd="sng" algn="ctr">
-                      <a:solidFill>
-                        <a:srgbClr val="E4E9EF"/>
-                      </a:solidFill>
-                      <a:prstDash val="solid"/>
-                      <a:round/>
-                      <a:headEnd type="none" w="med" len="med"/>
-                      <a:tailEnd type="none" w="med" len="med"/>
-                    </a:lnT>
-                    <a:lnB w="9525" cap="flat" cmpd="sng" algn="ctr">
-                      <a:solidFill>
-                        <a:srgbClr val="E4E9EF"/>
-                      </a:solidFill>
-                      <a:prstDash val="solid"/>
-                      <a:round/>
-                      <a:headEnd type="none" w="med" len="med"/>
-                      <a:tailEnd type="none" w="med" len="med"/>
-                    </a:lnB>
-                    <a:solidFill>
-                      <a:srgbClr val="FFFFFF"/>
-                    </a:solidFill>
-                  </a:tcPr>
-                </a:tc>
-                <a:tc>
-                  <a:txBody>
-                    <a:bodyPr/>
-                    <a:lstStyle/>
-                    <a:p>
-                      <a:pPr algn="ctr" indent="0" marL="0">
-                        <a:buNone/>
-                      </a:pPr>
-                      <a:r>
-                        <a:rPr lang="en-US" sz="1050" dirty="0">
-                          <a:solidFill>
-                            <a:srgbClr val="1C2B3A"/>
-                          </a:solidFill>
-                          <a:latin typeface="Calibri" pitchFamily="34" charset="0"/>
-                          <a:ea typeface="Calibri" pitchFamily="34" charset="-122"/>
-                          <a:cs typeface="Calibri" pitchFamily="34" charset="-120"/>
-                        </a:rPr>
-                        <a:t>52% · 765</a:t>
-                      </a:r>
-                      <a:endParaRPr lang="en-US" sz="1050" dirty="0">
-                        <a:latin typeface="Calibri" charset="0"/>
-                        <a:ea typeface="Calibri" charset="0"/>
-                        <a:cs typeface="Calibri" charset="0"/>
-                      </a:endParaRPr>
-                    </a:p>
-                  </a:txBody>
-                  <a:tcPr marL="91440" marR="91440" marT="45720" marB="45720" anchor="ctr">
-                    <a:lnL w="9525" cap="flat" cmpd="sng" algn="ctr">
-                      <a:solidFill>
-                        <a:srgbClr val="E4E9EF"/>
-                      </a:solidFill>
-                      <a:prstDash val="solid"/>
-                      <a:round/>
-                      <a:headEnd type="none" w="med" len="med"/>
-                      <a:tailEnd type="none" w="med" len="med"/>
-                    </a:lnL>
-                    <a:lnR w="9525" cap="flat" cmpd="sng" algn="ctr">
-                      <a:solidFill>
-                        <a:srgbClr val="E4E9EF"/>
-                      </a:solidFill>
-                      <a:prstDash val="solid"/>
-                      <a:round/>
-                      <a:headEnd type="none" w="med" len="med"/>
-                      <a:tailEnd type="none" w="med" len="med"/>
-                    </a:lnR>
-                    <a:lnT w="9525" cap="flat" cmpd="sng" algn="ctr">
-                      <a:solidFill>
-                        <a:srgbClr val="E4E9EF"/>
-                      </a:solidFill>
-                      <a:prstDash val="solid"/>
-                      <a:round/>
-                      <a:headEnd type="none" w="med" len="med"/>
-                      <a:tailEnd type="none" w="med" len="med"/>
-                    </a:lnT>
-                    <a:lnB w="9525" cap="flat" cmpd="sng" algn="ctr">
-                      <a:solidFill>
-                        <a:srgbClr val="E4E9EF"/>
-                      </a:solidFill>
-                      <a:prstDash val="solid"/>
-                      <a:round/>
-                      <a:headEnd type="none" w="med" len="med"/>
-                      <a:tailEnd type="none" w="med" len="med"/>
-                    </a:lnB>
-                    <a:solidFill>
-                      <a:srgbClr val="FFFFFF"/>
-                    </a:solidFill>
-                  </a:tcPr>
-                </a:tc>
-                <a:tc>
-                  <a:txBody>
-                    <a:bodyPr/>
-                    <a:lstStyle/>
-                    <a:p>
-                      <a:pPr algn="ctr" indent="0" marL="0">
-                        <a:buNone/>
-                      </a:pPr>
-                      <a:r>
-                        <a:rPr lang="en-US" sz="1050" dirty="0">
-                          <a:solidFill>
-                            <a:srgbClr val="1C2B3A"/>
-                          </a:solidFill>
-                          <a:latin typeface="Calibri" pitchFamily="34" charset="0"/>
-                          <a:ea typeface="Calibri" pitchFamily="34" charset="-122"/>
-                          <a:cs typeface="Calibri" pitchFamily="34" charset="-120"/>
-                        </a:rPr>
-                        <a:t>42.1% · 432 assists</a:t>
-                      </a:r>
-                      <a:endParaRPr lang="en-US" sz="1050" dirty="0">
-                        <a:latin typeface="Calibri" charset="0"/>
-                        <a:ea typeface="Calibri" charset="0"/>
-                        <a:cs typeface="Calibri" charset="0"/>
-                      </a:endParaRPr>
-                    </a:p>
-                  </a:txBody>
-                  <a:tcPr marL="91440" marR="91440" marT="45720" marB="45720" anchor="ctr">
-                    <a:lnL w="9525" cap="flat" cmpd="sng" algn="ctr">
-                      <a:solidFill>
-                        <a:srgbClr val="E4E9EF"/>
-                      </a:solidFill>
-                      <a:prstDash val="solid"/>
-                      <a:round/>
-                      <a:headEnd type="none" w="med" len="med"/>
-                      <a:tailEnd type="none" w="med" len="med"/>
-                    </a:lnL>
-                    <a:lnR w="9525" cap="flat" cmpd="sng" algn="ctr">
-                      <a:solidFill>
-                        <a:srgbClr val="E4E9EF"/>
-                      </a:solidFill>
-                      <a:prstDash val="solid"/>
-                      <a:round/>
-                      <a:headEnd type="none" w="med" len="med"/>
-                      <a:tailEnd type="none" w="med" len="med"/>
-                    </a:lnR>
-                    <a:lnT w="9525" cap="flat" cmpd="sng" algn="ctr">
-                      <a:solidFill>
-                        <a:srgbClr val="E4E9EF"/>
-                      </a:solidFill>
-                      <a:prstDash val="solid"/>
-                      <a:round/>
-                      <a:headEnd type="none" w="med" len="med"/>
-                      <a:tailEnd type="none" w="med" len="med"/>
-                    </a:lnT>
-                    <a:lnB w="9525" cap="flat" cmpd="sng" algn="ctr">
-                      <a:solidFill>
-                        <a:srgbClr val="E4E9EF"/>
-                      </a:solidFill>
-                      <a:prstDash val="solid"/>
-                      <a:round/>
-                      <a:headEnd type="none" w="med" len="med"/>
-                      <a:tailEnd type="none" w="med" len="med"/>
-                    </a:lnB>
-                    <a:solidFill>
-                      <a:srgbClr val="FFFFFF"/>
-                    </a:solidFill>
-                  </a:tcPr>
-                </a:tc>
-                <a:tc>
-                  <a:txBody>
-                    <a:bodyPr/>
-                    <a:lstStyle/>
-                    <a:p>
-                      <a:pPr algn="ctr" indent="0" marL="0">
-                        <a:buNone/>
-                      </a:pPr>
-                      <a:r>
-                        <a:rPr lang="en-US" sz="1050" b="1" dirty="0">
-                          <a:solidFill>
-                            <a:srgbClr val="C8102E"/>
-                          </a:solidFill>
-                          <a:latin typeface="Calibri" pitchFamily="34" charset="0"/>
-                          <a:ea typeface="Calibri" pitchFamily="34" charset="-122"/>
-                          <a:cs typeface="Calibri" pitchFamily="34" charset="-120"/>
-                        </a:rPr>
-                        <a:t>wrong</a:t>
-                      </a:r>
-                      <a:endParaRPr lang="en-US" sz="1050" dirty="0">
-                        <a:latin typeface="Calibri" charset="0"/>
-                        <a:ea typeface="Calibri" charset="0"/>
-                        <a:cs typeface="Calibri" charset="0"/>
-                      </a:endParaRPr>
-                    </a:p>
-                  </a:txBody>
-                  <a:tcPr marL="91440" marR="91440" marT="45720" marB="45720" anchor="ctr">
-                    <a:lnL w="9525" cap="flat" cmpd="sng" algn="ctr">
-                      <a:solidFill>
-                        <a:srgbClr val="E4E9EF"/>
-                      </a:solidFill>
-                      <a:prstDash val="solid"/>
-                      <a:round/>
-                      <a:headEnd type="none" w="med" len="med"/>
-                      <a:tailEnd type="none" w="med" len="med"/>
-                    </a:lnL>
-                    <a:lnR w="9525" cap="flat" cmpd="sng" algn="ctr">
-                      <a:solidFill>
-                        <a:srgbClr val="E4E9EF"/>
-                      </a:solidFill>
-                      <a:prstDash val="solid"/>
-                      <a:round/>
-                      <a:headEnd type="none" w="med" len="med"/>
-                      <a:tailEnd type="none" w="med" len="med"/>
-                    </a:lnR>
-                    <a:lnT w="9525" cap="flat" cmpd="sng" algn="ctr">
-                      <a:solidFill>
-                        <a:srgbClr val="E4E9EF"/>
-                      </a:solidFill>
-                      <a:prstDash val="solid"/>
-                      <a:round/>
-                      <a:headEnd type="none" w="med" len="med"/>
-                      <a:tailEnd type="none" w="med" len="med"/>
-                    </a:lnT>
-                    <a:lnB w="9525" cap="flat" cmpd="sng" algn="ctr">
-                      <a:solidFill>
-                        <a:srgbClr val="E4E9EF"/>
-                      </a:solidFill>
-                      <a:prstDash val="solid"/>
-                      <a:round/>
-                      <a:headEnd type="none" w="med" len="med"/>
-                      <a:tailEnd type="none" w="med" len="med"/>
-                    </a:lnB>
-                    <a:solidFill>
-                      <a:srgbClr val="FFFFFF"/>
-                    </a:solidFill>
-                  </a:tcPr>
-                </a:tc>
-              </a:tr>
-              <a:tr h="310896">
-                <a:tc>
-                  <a:txBody>
-                    <a:bodyPr/>
-                    <a:lstStyle/>
-                    <a:p>
-                      <a:pPr indent="0" marL="0">
-                        <a:buNone/>
-                      </a:pPr>
-                      <a:r>
-                        <a:rPr lang="en-US" sz="1050" dirty="0">
-                          <a:solidFill>
-                            <a:srgbClr val="1C2B3A"/>
-                          </a:solidFill>
-                          <a:latin typeface="Calibri" pitchFamily="34" charset="0"/>
-                          <a:ea typeface="Calibri" pitchFamily="34" charset="-122"/>
-                          <a:cs typeface="Calibri" pitchFamily="34" charset="-120"/>
-                        </a:rPr>
-                        <a:t>Embiid projected rim share</a:t>
-                      </a:r>
-                      <a:endParaRPr lang="en-US" sz="1050" dirty="0">
-                        <a:latin typeface="Calibri" charset="0"/>
-                        <a:ea typeface="Calibri" charset="0"/>
-                        <a:cs typeface="Calibri" charset="0"/>
-                      </a:endParaRPr>
-                    </a:p>
-                  </a:txBody>
-                  <a:tcPr marL="91440" marR="91440" marT="45720" marB="45720" anchor="ctr">
-                    <a:lnL w="9525" cap="flat" cmpd="sng" algn="ctr">
-                      <a:solidFill>
-                        <a:srgbClr val="E4E9EF"/>
-                      </a:solidFill>
-                      <a:prstDash val="solid"/>
-                      <a:round/>
-                      <a:headEnd type="none" w="med" len="med"/>
-                      <a:tailEnd type="none" w="med" len="med"/>
-                    </a:lnL>
-                    <a:lnR w="9525" cap="flat" cmpd="sng" algn="ctr">
-                      <a:solidFill>
-                        <a:srgbClr val="E4E9EF"/>
-                      </a:solidFill>
-                      <a:prstDash val="solid"/>
-                      <a:round/>
-                      <a:headEnd type="none" w="med" len="med"/>
-                      <a:tailEnd type="none" w="med" len="med"/>
-                    </a:lnR>
-                    <a:lnT w="9525" cap="flat" cmpd="sng" algn="ctr">
-                      <a:solidFill>
-                        <a:srgbClr val="E4E9EF"/>
-                      </a:solidFill>
-                      <a:prstDash val="solid"/>
-                      <a:round/>
-                      <a:headEnd type="none" w="med" len="med"/>
-                      <a:tailEnd type="none" w="med" len="med"/>
-                    </a:lnT>
-                    <a:lnB w="9525" cap="flat" cmpd="sng" algn="ctr">
-                      <a:solidFill>
-                        <a:srgbClr val="E4E9EF"/>
-                      </a:solidFill>
-                      <a:prstDash val="solid"/>
-                      <a:round/>
-                      <a:headEnd type="none" w="med" len="med"/>
-                      <a:tailEnd type="none" w="med" len="med"/>
-                    </a:lnB>
-                    <a:solidFill>
-                      <a:srgbClr val="FFFFFF"/>
-                    </a:solidFill>
-                  </a:tcPr>
-                </a:tc>
-                <a:tc>
-                  <a:txBody>
-                    <a:bodyPr/>
-                    <a:lstStyle/>
-                    <a:p>
-                      <a:pPr algn="ctr" indent="0" marL="0">
-                        <a:buNone/>
-                      </a:pPr>
-                      <a:r>
-                        <a:rPr lang="en-US" sz="1050" dirty="0">
-                          <a:solidFill>
-                            <a:srgbClr val="1C2B3A"/>
-                          </a:solidFill>
-                          <a:latin typeface="Calibri" pitchFamily="34" charset="0"/>
-                          <a:ea typeface="Calibri" pitchFamily="34" charset="-122"/>
-                          <a:cs typeface="Calibri" pitchFamily="34" charset="-120"/>
-                        </a:rPr>
-                        <a:t>42%</a:t>
-                      </a:r>
-                      <a:endParaRPr lang="en-US" sz="1050" dirty="0">
-                        <a:latin typeface="Calibri" charset="0"/>
-                        <a:ea typeface="Calibri" charset="0"/>
-                        <a:cs typeface="Calibri" charset="0"/>
-                      </a:endParaRPr>
-                    </a:p>
-                  </a:txBody>
-                  <a:tcPr marL="91440" marR="91440" marT="45720" marB="45720" anchor="ctr">
-                    <a:lnL w="9525" cap="flat" cmpd="sng" algn="ctr">
-                      <a:solidFill>
-                        <a:srgbClr val="E4E9EF"/>
-                      </a:solidFill>
-                      <a:prstDash val="solid"/>
-                      <a:round/>
-                      <a:headEnd type="none" w="med" len="med"/>
-                      <a:tailEnd type="none" w="med" len="med"/>
-                    </a:lnL>
-                    <a:lnR w="9525" cap="flat" cmpd="sng" algn="ctr">
-                      <a:solidFill>
-                        <a:srgbClr val="E4E9EF"/>
-                      </a:solidFill>
-                      <a:prstDash val="solid"/>
-                      <a:round/>
-                      <a:headEnd type="none" w="med" len="med"/>
-                      <a:tailEnd type="none" w="med" len="med"/>
-                    </a:lnR>
-                    <a:lnT w="9525" cap="flat" cmpd="sng" algn="ctr">
-                      <a:solidFill>
-                        <a:srgbClr val="E4E9EF"/>
-                      </a:solidFill>
-                      <a:prstDash val="solid"/>
-                      <a:round/>
-                      <a:headEnd type="none" w="med" len="med"/>
-                      <a:tailEnd type="none" w="med" len="med"/>
-                    </a:lnT>
-                    <a:lnB w="9525" cap="flat" cmpd="sng" algn="ctr">
-                      <a:solidFill>
-                        <a:srgbClr val="E4E9EF"/>
-                      </a:solidFill>
-                      <a:prstDash val="solid"/>
-                      <a:round/>
-                      <a:headEnd type="none" w="med" len="med"/>
-                      <a:tailEnd type="none" w="med" len="med"/>
-                    </a:lnB>
-                    <a:solidFill>
-                      <a:srgbClr val="FFFFFF"/>
-                    </a:solidFill>
-                  </a:tcPr>
-                </a:tc>
-                <a:tc>
-                  <a:txBody>
-                    <a:bodyPr/>
-                    <a:lstStyle/>
-                    <a:p>
-                      <a:pPr algn="ctr" indent="0" marL="0">
-                        <a:buNone/>
-                      </a:pPr>
-                      <a:r>
-                        <a:rPr lang="en-US" sz="1050" dirty="0">
-                          <a:solidFill>
-                            <a:srgbClr val="1C2B3A"/>
-                          </a:solidFill>
-                          <a:latin typeface="Calibri" pitchFamily="34" charset="0"/>
-                          <a:ea typeface="Calibri" pitchFamily="34" charset="-122"/>
-                          <a:cs typeface="Calibri" pitchFamily="34" charset="-120"/>
-                        </a:rPr>
-                        <a:t>41.2% (range 39-44)</a:t>
-                      </a:r>
-                      <a:endParaRPr lang="en-US" sz="1050" dirty="0">
-                        <a:latin typeface="Calibri" charset="0"/>
-                        <a:ea typeface="Calibri" charset="0"/>
-                        <a:cs typeface="Calibri" charset="0"/>
-                      </a:endParaRPr>
-                    </a:p>
-                  </a:txBody>
-                  <a:tcPr marL="91440" marR="91440" marT="45720" marB="45720" anchor="ctr">
-                    <a:lnL w="9525" cap="flat" cmpd="sng" algn="ctr">
-                      <a:solidFill>
-                        <a:srgbClr val="E4E9EF"/>
-                      </a:solidFill>
-                      <a:prstDash val="solid"/>
-                      <a:round/>
-                      <a:headEnd type="none" w="med" len="med"/>
-                      <a:tailEnd type="none" w="med" len="med"/>
-                    </a:lnL>
-                    <a:lnR w="9525" cap="flat" cmpd="sng" algn="ctr">
-                      <a:solidFill>
-                        <a:srgbClr val="E4E9EF"/>
-                      </a:solidFill>
-                      <a:prstDash val="solid"/>
-                      <a:round/>
-                      <a:headEnd type="none" w="med" len="med"/>
-                      <a:tailEnd type="none" w="med" len="med"/>
-                    </a:lnR>
-                    <a:lnT w="9525" cap="flat" cmpd="sng" algn="ctr">
-                      <a:solidFill>
-                        <a:srgbClr val="E4E9EF"/>
-                      </a:solidFill>
-                      <a:prstDash val="solid"/>
-                      <a:round/>
-                      <a:headEnd type="none" w="med" len="med"/>
-                      <a:tailEnd type="none" w="med" len="med"/>
-                    </a:lnT>
-                    <a:lnB w="9525" cap="flat" cmpd="sng" algn="ctr">
-                      <a:solidFill>
-                        <a:srgbClr val="E4E9EF"/>
-                      </a:solidFill>
-                      <a:prstDash val="solid"/>
-                      <a:round/>
-                      <a:headEnd type="none" w="med" len="med"/>
-                      <a:tailEnd type="none" w="med" len="med"/>
-                    </a:lnB>
-                    <a:solidFill>
-                      <a:srgbClr val="FFFFFF"/>
-                    </a:solidFill>
-                  </a:tcPr>
-                </a:tc>
-                <a:tc>
-                  <a:txBody>
-                    <a:bodyPr/>
-                    <a:lstStyle/>
-                    <a:p>
-                      <a:pPr algn="ctr" indent="0" marL="0">
-                        <a:buNone/>
-                      </a:pPr>
-                      <a:r>
-                        <a:rPr lang="en-US" sz="1050" b="1" dirty="0">
-                          <a:solidFill>
-                            <a:srgbClr val="1E7A46"/>
-                          </a:solidFill>
-                          <a:latin typeface="Calibri" pitchFamily="34" charset="0"/>
-                          <a:ea typeface="Calibri" pitchFamily="34" charset="-122"/>
-                          <a:cs typeface="Calibri" pitchFamily="34" charset="-120"/>
-                        </a:rPr>
-                        <a:t>close</a:t>
-                      </a:r>
-                      <a:endParaRPr lang="en-US" sz="1050" dirty="0">
-                        <a:latin typeface="Calibri" charset="0"/>
-                        <a:ea typeface="Calibri" charset="0"/>
-                        <a:cs typeface="Calibri" charset="0"/>
-                      </a:endParaRPr>
-                    </a:p>
-                  </a:txBody>
-                  <a:tcPr marL="91440" marR="91440" marT="45720" marB="45720" anchor="ctr">
-                    <a:lnL w="9525" cap="flat" cmpd="sng" algn="ctr">
-                      <a:solidFill>
-                        <a:srgbClr val="E4E9EF"/>
-                      </a:solidFill>
-                      <a:prstDash val="solid"/>
-                      <a:round/>
-                      <a:headEnd type="none" w="med" len="med"/>
-                      <a:tailEnd type="none" w="med" len="med"/>
-                    </a:lnL>
-                    <a:lnR w="9525" cap="flat" cmpd="sng" algn="ctr">
-                      <a:solidFill>
-                        <a:srgbClr val="E4E9EF"/>
-                      </a:solidFill>
-                      <a:prstDash val="solid"/>
-                      <a:round/>
-                      <a:headEnd type="none" w="med" len="med"/>
-                      <a:tailEnd type="none" w="med" len="med"/>
-                    </a:lnR>
-                    <a:lnT w="9525" cap="flat" cmpd="sng" algn="ctr">
-                      <a:solidFill>
-                        <a:srgbClr val="E4E9EF"/>
-                      </a:solidFill>
-                      <a:prstDash val="solid"/>
-                      <a:round/>
-                      <a:headEnd type="none" w="med" len="med"/>
-                      <a:tailEnd type="none" w="med" len="med"/>
-                    </a:lnT>
-                    <a:lnB w="9525" cap="flat" cmpd="sng" algn="ctr">
-                      <a:solidFill>
-                        <a:srgbClr val="E4E9EF"/>
-                      </a:solidFill>
-                      <a:prstDash val="solid"/>
-                      <a:round/>
-                      <a:headEnd type="none" w="med" len="med"/>
-                      <a:tailEnd type="none" w="med" len="med"/>
-                    </a:lnB>
-                    <a:solidFill>
-                      <a:srgbClr val="FFFFFF"/>
-                    </a:solidFill>
-                  </a:tcPr>
-                </a:tc>
-              </a:tr>
-              <a:tr h="310896">
-                <a:tc>
-                  <a:txBody>
-                    <a:bodyPr/>
-                    <a:lstStyle/>
-                    <a:p>
-                      <a:pPr indent="0" marL="0">
-                        <a:buNone/>
-                      </a:pPr>
-                      <a:r>
-                        <a:rPr lang="en-US" sz="1050" dirty="0">
-                          <a:solidFill>
-                            <a:srgbClr val="1C2B3A"/>
-                          </a:solidFill>
-                          <a:latin typeface="Calibri" pitchFamily="34" charset="0"/>
-                          <a:ea typeface="Calibri" pitchFamily="34" charset="-122"/>
-                          <a:cs typeface="Calibri" pitchFamily="34" charset="-120"/>
-                        </a:rPr>
-                        <a:t>Edgecombe corner-3 share → projection</a:t>
-                      </a:r>
-                      <a:endParaRPr lang="en-US" sz="1050" dirty="0">
-                        <a:latin typeface="Calibri" charset="0"/>
-                        <a:ea typeface="Calibri" charset="0"/>
-                        <a:cs typeface="Calibri" charset="0"/>
-                      </a:endParaRPr>
-                    </a:p>
-                  </a:txBody>
-                  <a:tcPr marL="91440" marR="91440" marT="45720" marB="45720" anchor="ctr">
-                    <a:lnL w="9525" cap="flat" cmpd="sng" algn="ctr">
-                      <a:solidFill>
-                        <a:srgbClr val="E4E9EF"/>
-                      </a:solidFill>
-                      <a:prstDash val="solid"/>
-                      <a:round/>
-                      <a:headEnd type="none" w="med" len="med"/>
-                      <a:tailEnd type="none" w="med" len="med"/>
-                    </a:lnL>
-                    <a:lnR w="9525" cap="flat" cmpd="sng" algn="ctr">
-                      <a:solidFill>
-                        <a:srgbClr val="E4E9EF"/>
-                      </a:solidFill>
-                      <a:prstDash val="solid"/>
-                      <a:round/>
-                      <a:headEnd type="none" w="med" len="med"/>
-                      <a:tailEnd type="none" w="med" len="med"/>
-                    </a:lnR>
-                    <a:lnT w="9525" cap="flat" cmpd="sng" algn="ctr">
-                      <a:solidFill>
-                        <a:srgbClr val="E4E9EF"/>
-                      </a:solidFill>
-                      <a:prstDash val="solid"/>
-                      <a:round/>
-                      <a:headEnd type="none" w="med" len="med"/>
-                      <a:tailEnd type="none" w="med" len="med"/>
-                    </a:lnT>
-                    <a:lnB w="9525" cap="flat" cmpd="sng" algn="ctr">
-                      <a:solidFill>
-                        <a:srgbClr val="E4E9EF"/>
-                      </a:solidFill>
-                      <a:prstDash val="solid"/>
-                      <a:round/>
-                      <a:headEnd type="none" w="med" len="med"/>
-                      <a:tailEnd type="none" w="med" len="med"/>
-                    </a:lnB>
-                    <a:solidFill>
-                      <a:srgbClr val="FFFFFF"/>
-                    </a:solidFill>
-                  </a:tcPr>
-                </a:tc>
-                <a:tc>
-                  <a:txBody>
-                    <a:bodyPr/>
-                    <a:lstStyle/>
-                    <a:p>
-                      <a:pPr algn="ctr" indent="0" marL="0">
-                        <a:buNone/>
-                      </a:pPr>
-                      <a:r>
-                        <a:rPr lang="en-US" sz="1050" dirty="0">
-                          <a:solidFill>
-                            <a:srgbClr val="1C2B3A"/>
-                          </a:solidFill>
-                          <a:latin typeface="Calibri" pitchFamily="34" charset="0"/>
-                          <a:ea typeface="Calibri" pitchFamily="34" charset="-122"/>
-                          <a:cs typeface="Calibri" pitchFamily="34" charset="-120"/>
-                        </a:rPr>
-                        <a:t>8% → 12%</a:t>
-                      </a:r>
-                      <a:endParaRPr lang="en-US" sz="1050" dirty="0">
-                        <a:latin typeface="Calibri" charset="0"/>
-                        <a:ea typeface="Calibri" charset="0"/>
-                        <a:cs typeface="Calibri" charset="0"/>
-                      </a:endParaRPr>
-                    </a:p>
-                  </a:txBody>
-                  <a:tcPr marL="91440" marR="91440" marT="45720" marB="45720" anchor="ctr">
-                    <a:lnL w="9525" cap="flat" cmpd="sng" algn="ctr">
-                      <a:solidFill>
-                        <a:srgbClr val="E4E9EF"/>
-                      </a:solidFill>
-                      <a:prstDash val="solid"/>
-                      <a:round/>
-                      <a:headEnd type="none" w="med" len="med"/>
-                      <a:tailEnd type="none" w="med" len="med"/>
-                    </a:lnL>
-                    <a:lnR w="9525" cap="flat" cmpd="sng" algn="ctr">
-                      <a:solidFill>
-                        <a:srgbClr val="E4E9EF"/>
-                      </a:solidFill>
-                      <a:prstDash val="solid"/>
-                      <a:round/>
-                      <a:headEnd type="none" w="med" len="med"/>
-                      <a:tailEnd type="none" w="med" len="med"/>
-                    </a:lnR>
-                    <a:lnT w="9525" cap="flat" cmpd="sng" algn="ctr">
-                      <a:solidFill>
-                        <a:srgbClr val="E4E9EF"/>
-                      </a:solidFill>
-                      <a:prstDash val="solid"/>
-                      <a:round/>
-                      <a:headEnd type="none" w="med" len="med"/>
-                      <a:tailEnd type="none" w="med" len="med"/>
-                    </a:lnT>
-                    <a:lnB w="9525" cap="flat" cmpd="sng" algn="ctr">
-                      <a:solidFill>
-                        <a:srgbClr val="E4E9EF"/>
-                      </a:solidFill>
-                      <a:prstDash val="solid"/>
-                      <a:round/>
-                      <a:headEnd type="none" w="med" len="med"/>
-                      <a:tailEnd type="none" w="med" len="med"/>
-                    </a:lnB>
-                    <a:solidFill>
-                      <a:srgbClr val="FFFFFF"/>
-                    </a:solidFill>
-                  </a:tcPr>
-                </a:tc>
-                <a:tc>
-                  <a:txBody>
-                    <a:bodyPr/>
-                    <a:lstStyle/>
-                    <a:p>
-                      <a:pPr algn="ctr" indent="0" marL="0">
-                        <a:buNone/>
-                      </a:pPr>
-                      <a:r>
-                        <a:rPr lang="en-US" sz="1050" dirty="0">
-                          <a:solidFill>
-                            <a:srgbClr val="1C2B3A"/>
-                          </a:solidFill>
-                          <a:latin typeface="Calibri" pitchFamily="34" charset="0"/>
-                          <a:ea typeface="Calibri" pitchFamily="34" charset="-122"/>
-                          <a:cs typeface="Calibri" pitchFamily="34" charset="-120"/>
-                        </a:rPr>
-                        <a:t>5.5% → 6.9%</a:t>
-                      </a:r>
-                      <a:endParaRPr lang="en-US" sz="1050" dirty="0">
-                        <a:latin typeface="Calibri" charset="0"/>
-                        <a:ea typeface="Calibri" charset="0"/>
-                        <a:cs typeface="Calibri" charset="0"/>
-                      </a:endParaRPr>
-                    </a:p>
-                  </a:txBody>
-                  <a:tcPr marL="91440" marR="91440" marT="45720" marB="45720" anchor="ctr">
-                    <a:lnL w="9525" cap="flat" cmpd="sng" algn="ctr">
-                      <a:solidFill>
-                        <a:srgbClr val="E4E9EF"/>
-                      </a:solidFill>
-                      <a:prstDash val="solid"/>
-                      <a:round/>
-                      <a:headEnd type="none" w="med" len="med"/>
-                      <a:tailEnd type="none" w="med" len="med"/>
-                    </a:lnL>
-                    <a:lnR w="9525" cap="flat" cmpd="sng" algn="ctr">
-                      <a:solidFill>
-                        <a:srgbClr val="E4E9EF"/>
-                      </a:solidFill>
-                      <a:prstDash val="solid"/>
-                      <a:round/>
-                      <a:headEnd type="none" w="med" len="med"/>
-                      <a:tailEnd type="none" w="med" len="med"/>
-                    </a:lnR>
-                    <a:lnT w="9525" cap="flat" cmpd="sng" algn="ctr">
-                      <a:solidFill>
-                        <a:srgbClr val="E4E9EF"/>
-                      </a:solidFill>
-                      <a:prstDash val="solid"/>
-                      <a:round/>
-                      <a:headEnd type="none" w="med" len="med"/>
-                      <a:tailEnd type="none" w="med" len="med"/>
-                    </a:lnT>
-                    <a:lnB w="9525" cap="flat" cmpd="sng" algn="ctr">
-                      <a:solidFill>
-                        <a:srgbClr val="E4E9EF"/>
-                      </a:solidFill>
-                      <a:prstDash val="solid"/>
-                      <a:round/>
-                      <a:headEnd type="none" w="med" len="med"/>
-                      <a:tailEnd type="none" w="med" len="med"/>
-                    </a:lnB>
-                    <a:solidFill>
-                      <a:srgbClr val="FFFFFF"/>
-                    </a:solidFill>
-                  </a:tcPr>
-                </a:tc>
-                <a:tc>
-                  <a:txBody>
-                    <a:bodyPr/>
-                    <a:lstStyle/>
-                    <a:p>
-                      <a:pPr algn="ctr" indent="0" marL="0">
-                        <a:buNone/>
-                      </a:pPr>
-                      <a:r>
-                        <a:rPr lang="en-US" sz="1050" b="1" dirty="0">
-                          <a:solidFill>
-                            <a:srgbClr val="C8102E"/>
-                          </a:solidFill>
-                          <a:latin typeface="Calibri" pitchFamily="34" charset="0"/>
-                          <a:ea typeface="Calibri" pitchFamily="34" charset="-122"/>
-                          <a:cs typeface="Calibri" pitchFamily="34" charset="-120"/>
-                        </a:rPr>
-                        <a:t>wrong</a:t>
-                      </a:r>
-                      <a:endParaRPr lang="en-US" sz="1050" dirty="0">
-                        <a:latin typeface="Calibri" charset="0"/>
-                        <a:ea typeface="Calibri" charset="0"/>
-                        <a:cs typeface="Calibri" charset="0"/>
-                      </a:endParaRPr>
-                    </a:p>
-                  </a:txBody>
-                  <a:tcPr marL="91440" marR="91440" marT="45720" marB="45720" anchor="ctr">
-                    <a:lnL w="9525" cap="flat" cmpd="sng" algn="ctr">
-                      <a:solidFill>
-                        <a:srgbClr val="E4E9EF"/>
-                      </a:solidFill>
-                      <a:prstDash val="solid"/>
-                      <a:round/>
-                      <a:headEnd type="none" w="med" len="med"/>
-                      <a:tailEnd type="none" w="med" len="med"/>
-                    </a:lnL>
-                    <a:lnR w="9525" cap="flat" cmpd="sng" algn="ctr">
-                      <a:solidFill>
-                        <a:srgbClr val="E4E9EF"/>
-                      </a:solidFill>
-                      <a:prstDash val="solid"/>
-                      <a:round/>
-                      <a:headEnd type="none" w="med" len="med"/>
-                      <a:tailEnd type="none" w="med" len="med"/>
-                    </a:lnR>
-                    <a:lnT w="9525" cap="flat" cmpd="sng" algn="ctr">
-                      <a:solidFill>
-                        <a:srgbClr val="E4E9EF"/>
-                      </a:solidFill>
-                      <a:prstDash val="solid"/>
-                      <a:round/>
-                      <a:headEnd type="none" w="med" len="med"/>
-                      <a:tailEnd type="none" w="med" len="med"/>
-                    </a:lnT>
-                    <a:lnB w="9525" cap="flat" cmpd="sng" algn="ctr">
-                      <a:solidFill>
-                        <a:srgbClr val="E4E9EF"/>
-                      </a:solidFill>
-                      <a:prstDash val="solid"/>
-                      <a:round/>
-                      <a:headEnd type="none" w="med" len="med"/>
-                      <a:tailEnd type="none" w="med" len="med"/>
-                    </a:lnB>
-                    <a:solidFill>
-                      <a:srgbClr val="FFFFFF"/>
-                    </a:solidFill>
-                  </a:tcPr>
-                </a:tc>
-              </a:tr>
-              <a:tr h="310896">
-                <a:tc>
-                  <a:txBody>
-                    <a:bodyPr/>
-                    <a:lstStyle/>
-                    <a:p>
-                      <a:pPr indent="0" marL="0">
-                        <a:buNone/>
-                      </a:pPr>
-                      <a:r>
-                        <a:rPr lang="en-US" sz="1050" dirty="0">
-                          <a:solidFill>
-                            <a:srgbClr val="1C2B3A"/>
-                          </a:solidFill>
-                          <a:latin typeface="Calibri" pitchFamily="34" charset="0"/>
-                          <a:ea typeface="Calibri" pitchFamily="34" charset="-122"/>
-                          <a:cs typeface="Calibri" pitchFamily="34" charset="-120"/>
-                        </a:rPr>
-                        <a:t>LeBron projected usage / TS</a:t>
-                      </a:r>
-                      <a:endParaRPr lang="en-US" sz="1050" dirty="0">
-                        <a:latin typeface="Calibri" charset="0"/>
-                        <a:ea typeface="Calibri" charset="0"/>
-                        <a:cs typeface="Calibri" charset="0"/>
-                      </a:endParaRPr>
-                    </a:p>
-                  </a:txBody>
-                  <a:tcPr marL="91440" marR="91440" marT="45720" marB="45720" anchor="ctr">
-                    <a:lnL w="9525" cap="flat" cmpd="sng" algn="ctr">
-                      <a:solidFill>
-                        <a:srgbClr val="E4E9EF"/>
-                      </a:solidFill>
-                      <a:prstDash val="solid"/>
-                      <a:round/>
-                      <a:headEnd type="none" w="med" len="med"/>
-                      <a:tailEnd type="none" w="med" len="med"/>
-                    </a:lnL>
-                    <a:lnR w="9525" cap="flat" cmpd="sng" algn="ctr">
-                      <a:solidFill>
-                        <a:srgbClr val="E4E9EF"/>
-                      </a:solidFill>
-                      <a:prstDash val="solid"/>
-                      <a:round/>
-                      <a:headEnd type="none" w="med" len="med"/>
-                      <a:tailEnd type="none" w="med" len="med"/>
-                    </a:lnR>
-                    <a:lnT w="9525" cap="flat" cmpd="sng" algn="ctr">
-                      <a:solidFill>
-                        <a:srgbClr val="E4E9EF"/>
-                      </a:solidFill>
-                      <a:prstDash val="solid"/>
-                      <a:round/>
-                      <a:headEnd type="none" w="med" len="med"/>
-                      <a:tailEnd type="none" w="med" len="med"/>
-                    </a:lnT>
-                    <a:lnB w="9525" cap="flat" cmpd="sng" algn="ctr">
-                      <a:solidFill>
-                        <a:srgbClr val="E4E9EF"/>
-                      </a:solidFill>
-                      <a:prstDash val="solid"/>
-                      <a:round/>
-                      <a:headEnd type="none" w="med" len="med"/>
-                      <a:tailEnd type="none" w="med" len="med"/>
-                    </a:lnB>
-                    <a:solidFill>
-                      <a:srgbClr val="FFFFFF"/>
-                    </a:solidFill>
-                  </a:tcPr>
-                </a:tc>
-                <a:tc>
-                  <a:txBody>
-                    <a:bodyPr/>
-                    <a:lstStyle/>
-                    <a:p>
-                      <a:pPr algn="ctr" indent="0" marL="0">
-                        <a:buNone/>
-                      </a:pPr>
-                      <a:r>
-                        <a:rPr lang="en-US" sz="1050" dirty="0">
-                          <a:solidFill>
-                            <a:srgbClr val="1C2B3A"/>
-                          </a:solidFill>
-                          <a:latin typeface="Calibri" pitchFamily="34" charset="0"/>
-                          <a:ea typeface="Calibri" pitchFamily="34" charset="-122"/>
-                          <a:cs typeface="Calibri" pitchFamily="34" charset="-120"/>
-                        </a:rPr>
-                        <a:t>22% / .627</a:t>
-                      </a:r>
-                      <a:endParaRPr lang="en-US" sz="1050" dirty="0">
-                        <a:latin typeface="Calibri" charset="0"/>
-                        <a:ea typeface="Calibri" charset="0"/>
-                        <a:cs typeface="Calibri" charset="0"/>
-                      </a:endParaRPr>
-                    </a:p>
-                  </a:txBody>
-                  <a:tcPr marL="91440" marR="91440" marT="45720" marB="45720" anchor="ctr">
-                    <a:lnL w="9525" cap="flat" cmpd="sng" algn="ctr">
-                      <a:solidFill>
-                        <a:srgbClr val="E4E9EF"/>
-                      </a:solidFill>
-                      <a:prstDash val="solid"/>
-                      <a:round/>
-                      <a:headEnd type="none" w="med" len="med"/>
-                      <a:tailEnd type="none" w="med" len="med"/>
-                    </a:lnL>
-                    <a:lnR w="9525" cap="flat" cmpd="sng" algn="ctr">
-                      <a:solidFill>
-                        <a:srgbClr val="E4E9EF"/>
-                      </a:solidFill>
-                      <a:prstDash val="solid"/>
-                      <a:round/>
-                      <a:headEnd type="none" w="med" len="med"/>
-                      <a:tailEnd type="none" w="med" len="med"/>
-                    </a:lnR>
-                    <a:lnT w="9525" cap="flat" cmpd="sng" algn="ctr">
-                      <a:solidFill>
-                        <a:srgbClr val="E4E9EF"/>
-                      </a:solidFill>
-                      <a:prstDash val="solid"/>
-                      <a:round/>
-                      <a:headEnd type="none" w="med" len="med"/>
-                      <a:tailEnd type="none" w="med" len="med"/>
-                    </a:lnT>
-                    <a:lnB w="9525" cap="flat" cmpd="sng" algn="ctr">
-                      <a:solidFill>
-                        <a:srgbClr val="E4E9EF"/>
-                      </a:solidFill>
-                      <a:prstDash val="solid"/>
-                      <a:round/>
-                      <a:headEnd type="none" w="med" len="med"/>
-                      <a:tailEnd type="none" w="med" len="med"/>
-                    </a:lnB>
-                    <a:solidFill>
-                      <a:srgbClr val="FFFFFF"/>
-                    </a:solidFill>
-                  </a:tcPr>
-                </a:tc>
-                <a:tc>
-                  <a:txBody>
-                    <a:bodyPr/>
-                    <a:lstStyle/>
-                    <a:p>
-                      <a:pPr algn="ctr" indent="0" marL="0">
-                        <a:buNone/>
-                      </a:pPr>
-                      <a:r>
-                        <a:rPr lang="en-US" sz="1050" dirty="0">
-                          <a:solidFill>
-                            <a:srgbClr val="1C2B3A"/>
-                          </a:solidFill>
-                          <a:latin typeface="Calibri" pitchFamily="34" charset="0"/>
-                          <a:ea typeface="Calibri" pitchFamily="34" charset="-122"/>
-                          <a:cs typeface="Calibri" pitchFamily="34" charset="-120"/>
-                        </a:rPr>
-                        <a:t>21.5% / .60-.63</a:t>
-                      </a:r>
-                      <a:endParaRPr lang="en-US" sz="1050" dirty="0">
-                        <a:latin typeface="Calibri" charset="0"/>
-                        <a:ea typeface="Calibri" charset="0"/>
-                        <a:cs typeface="Calibri" charset="0"/>
-                      </a:endParaRPr>
-                    </a:p>
-                  </a:txBody>
-                  <a:tcPr marL="91440" marR="91440" marT="45720" marB="45720" anchor="ctr">
-                    <a:lnL w="9525" cap="flat" cmpd="sng" algn="ctr">
-                      <a:solidFill>
-                        <a:srgbClr val="E4E9EF"/>
-                      </a:solidFill>
-                      <a:prstDash val="solid"/>
-                      <a:round/>
-                      <a:headEnd type="none" w="med" len="med"/>
-                      <a:tailEnd type="none" w="med" len="med"/>
-                    </a:lnL>
-                    <a:lnR w="9525" cap="flat" cmpd="sng" algn="ctr">
-                      <a:solidFill>
-                        <a:srgbClr val="E4E9EF"/>
-                      </a:solidFill>
-                      <a:prstDash val="solid"/>
-                      <a:round/>
-                      <a:headEnd type="none" w="med" len="med"/>
-                      <a:tailEnd type="none" w="med" len="med"/>
-                    </a:lnR>
-                    <a:lnT w="9525" cap="flat" cmpd="sng" algn="ctr">
-                      <a:solidFill>
-                        <a:srgbClr val="E4E9EF"/>
-                      </a:solidFill>
-                      <a:prstDash val="solid"/>
-                      <a:round/>
-                      <a:headEnd type="none" w="med" len="med"/>
-                      <a:tailEnd type="none" w="med" len="med"/>
-                    </a:lnT>
-                    <a:lnB w="9525" cap="flat" cmpd="sng" algn="ctr">
-                      <a:solidFill>
-                        <a:srgbClr val="E4E9EF"/>
-                      </a:solidFill>
-                      <a:prstDash val="solid"/>
-                      <a:round/>
-                      <a:headEnd type="none" w="med" len="med"/>
-                      <a:tailEnd type="none" w="med" len="med"/>
-                    </a:lnB>
-                    <a:solidFill>
-                      <a:srgbClr val="FFFFFF"/>
-                    </a:solidFill>
-                  </a:tcPr>
-                </a:tc>
-                <a:tc>
-                  <a:txBody>
-                    <a:bodyPr/>
-                    <a:lstStyle/>
-                    <a:p>
-                      <a:pPr algn="ctr" indent="0" marL="0">
-                        <a:buNone/>
-                      </a:pPr>
-                      <a:r>
-                        <a:rPr lang="en-US" sz="1050" b="1" dirty="0">
-                          <a:solidFill>
-                            <a:srgbClr val="B07A00"/>
-                          </a:solidFill>
-                          <a:latin typeface="Calibri" pitchFamily="34" charset="0"/>
-                          <a:ea typeface="Calibri" pitchFamily="34" charset="-122"/>
-                          <a:cs typeface="Calibri" pitchFamily="34" charset="-120"/>
-                        </a:rPr>
-                        <a:t>edge</a:t>
-                      </a:r>
-                      <a:endParaRPr lang="en-US" sz="1050" dirty="0">
-                        <a:latin typeface="Calibri" charset="0"/>
-                        <a:ea typeface="Calibri" charset="0"/>
-                        <a:cs typeface="Calibri" charset="0"/>
-                      </a:endParaRPr>
-                    </a:p>
-                  </a:txBody>
-                  <a:tcPr marL="91440" marR="91440" marT="45720" marB="45720" anchor="ctr">
-                    <a:lnL w="9525" cap="flat" cmpd="sng" algn="ctr">
-                      <a:solidFill>
-                        <a:srgbClr val="E4E9EF"/>
-                      </a:solidFill>
-                      <a:prstDash val="solid"/>
-                      <a:round/>
-                      <a:headEnd type="none" w="med" len="med"/>
-                      <a:tailEnd type="none" w="med" len="med"/>
-                    </a:lnL>
-                    <a:lnR w="9525" cap="flat" cmpd="sng" algn="ctr">
-                      <a:solidFill>
-                        <a:srgbClr val="E4E9EF"/>
-                      </a:solidFill>
-                      <a:prstDash val="solid"/>
-                      <a:round/>
-                      <a:headEnd type="none" w="med" len="med"/>
-                      <a:tailEnd type="none" w="med" len="med"/>
-                    </a:lnR>
-                    <a:lnT w="9525" cap="flat" cmpd="sng" algn="ctr">
-                      <a:solidFill>
-                        <a:srgbClr val="E4E9EF"/>
-                      </a:solidFill>
-                      <a:prstDash val="solid"/>
-                      <a:round/>
-                      <a:headEnd type="none" w="med" len="med"/>
-                      <a:tailEnd type="none" w="med" len="med"/>
-                    </a:lnT>
-                    <a:lnB w="9525" cap="flat" cmpd="sng" algn="ctr">
-                      <a:solidFill>
-                        <a:srgbClr val="E4E9EF"/>
-                      </a:solidFill>
-                      <a:prstDash val="solid"/>
-                      <a:round/>
-                      <a:headEnd type="none" w="med" len="med"/>
-                      <a:tailEnd type="none" w="med" len="med"/>
-                    </a:lnB>
-                    <a:solidFill>
-                      <a:srgbClr val="FFFFFF"/>
-                    </a:solidFill>
-                  </a:tcPr>
-                </a:tc>
-              </a:tr>
-              <a:tr h="310896">
-                <a:tc>
-                  <a:txBody>
-                    <a:bodyPr/>
-                    <a:lstStyle/>
-                    <a:p>
-                      <a:pPr indent="0" marL="0">
-                        <a:buNone/>
-                      </a:pPr>
-                      <a:r>
-                        <a:rPr lang="en-US" sz="1050" dirty="0">
-                          <a:solidFill>
-                            <a:srgbClr val="1C2B3A"/>
-                          </a:solidFill>
-                          <a:latin typeface="Calibri" pitchFamily="34" charset="0"/>
-                          <a:ea typeface="Calibri" pitchFamily="34" charset="-122"/>
-                          <a:cs typeface="Calibri" pitchFamily="34" charset="-120"/>
-                        </a:rPr>
-                        <a:t>Finals odds: 45w → 51w</a:t>
-                      </a:r>
-                      <a:endParaRPr lang="en-US" sz="1050" dirty="0">
-                        <a:latin typeface="Calibri" charset="0"/>
-                        <a:ea typeface="Calibri" charset="0"/>
-                        <a:cs typeface="Calibri" charset="0"/>
-                      </a:endParaRPr>
-                    </a:p>
-                  </a:txBody>
-                  <a:tcPr marL="91440" marR="91440" marT="45720" marB="45720" anchor="ctr">
-                    <a:lnL w="9525" cap="flat" cmpd="sng" algn="ctr">
-                      <a:solidFill>
-                        <a:srgbClr val="E4E9EF"/>
-                      </a:solidFill>
-                      <a:prstDash val="solid"/>
-                      <a:round/>
-                      <a:headEnd type="none" w="med" len="med"/>
-                      <a:tailEnd type="none" w="med" len="med"/>
-                    </a:lnL>
-                    <a:lnR w="9525" cap="flat" cmpd="sng" algn="ctr">
-                      <a:solidFill>
-                        <a:srgbClr val="E4E9EF"/>
-                      </a:solidFill>
-                      <a:prstDash val="solid"/>
-                      <a:round/>
-                      <a:headEnd type="none" w="med" len="med"/>
-                      <a:tailEnd type="none" w="med" len="med"/>
-                    </a:lnR>
-                    <a:lnT w="9525" cap="flat" cmpd="sng" algn="ctr">
-                      <a:solidFill>
-                        <a:srgbClr val="E4E9EF"/>
-                      </a:solidFill>
-                      <a:prstDash val="solid"/>
-                      <a:round/>
-                      <a:headEnd type="none" w="med" len="med"/>
-                      <a:tailEnd type="none" w="med" len="med"/>
-                    </a:lnT>
-                    <a:lnB w="9525" cap="flat" cmpd="sng" algn="ctr">
-                      <a:solidFill>
-                        <a:srgbClr val="E4E9EF"/>
-                      </a:solidFill>
-                      <a:prstDash val="solid"/>
-                      <a:round/>
-                      <a:headEnd type="none" w="med" len="med"/>
-                      <a:tailEnd type="none" w="med" len="med"/>
-                    </a:lnB>
-                    <a:solidFill>
-                      <a:srgbClr val="FFFFFF"/>
-                    </a:solidFill>
-                  </a:tcPr>
-                </a:tc>
-                <a:tc>
-                  <a:txBody>
-                    <a:bodyPr/>
-                    <a:lstStyle/>
-                    <a:p>
-                      <a:pPr algn="ctr" indent="0" marL="0">
-                        <a:buNone/>
-                      </a:pPr>
-                      <a:r>
-                        <a:rPr lang="en-US" sz="1050" dirty="0">
-                          <a:solidFill>
-                            <a:srgbClr val="1C2B3A"/>
-                          </a:solidFill>
-                          <a:latin typeface="Calibri" pitchFamily="34" charset="0"/>
-                          <a:ea typeface="Calibri" pitchFamily="34" charset="-122"/>
-                          <a:cs typeface="Calibri" pitchFamily="34" charset="-120"/>
-                        </a:rPr>
-                        <a:t>4% → 12% (3.2×)</a:t>
-                      </a:r>
-                      <a:endParaRPr lang="en-US" sz="1050" dirty="0">
-                        <a:latin typeface="Calibri" charset="0"/>
-                        <a:ea typeface="Calibri" charset="0"/>
-                        <a:cs typeface="Calibri" charset="0"/>
-                      </a:endParaRPr>
-                    </a:p>
-                  </a:txBody>
-                  <a:tcPr marL="91440" marR="91440" marT="45720" marB="45720" anchor="ctr">
-                    <a:lnL w="9525" cap="flat" cmpd="sng" algn="ctr">
-                      <a:solidFill>
-                        <a:srgbClr val="E4E9EF"/>
-                      </a:solidFill>
-                      <a:prstDash val="solid"/>
-                      <a:round/>
-                      <a:headEnd type="none" w="med" len="med"/>
-                      <a:tailEnd type="none" w="med" len="med"/>
-                    </a:lnL>
-                    <a:lnR w="9525" cap="flat" cmpd="sng" algn="ctr">
-                      <a:solidFill>
-                        <a:srgbClr val="E4E9EF"/>
-                      </a:solidFill>
-                      <a:prstDash val="solid"/>
-                      <a:round/>
-                      <a:headEnd type="none" w="med" len="med"/>
-                      <a:tailEnd type="none" w="med" len="med"/>
-                    </a:lnR>
-                    <a:lnT w="9525" cap="flat" cmpd="sng" algn="ctr">
-                      <a:solidFill>
-                        <a:srgbClr val="E4E9EF"/>
-                      </a:solidFill>
-                      <a:prstDash val="solid"/>
-                      <a:round/>
-                      <a:headEnd type="none" w="med" len="med"/>
-                      <a:tailEnd type="none" w="med" len="med"/>
-                    </a:lnT>
-                    <a:lnB w="9525" cap="flat" cmpd="sng" algn="ctr">
-                      <a:solidFill>
-                        <a:srgbClr val="E4E9EF"/>
-                      </a:solidFill>
-                      <a:prstDash val="solid"/>
-                      <a:round/>
-                      <a:headEnd type="none" w="med" len="med"/>
-                      <a:tailEnd type="none" w="med" len="med"/>
-                    </a:lnB>
-                    <a:solidFill>
-                      <a:srgbClr val="FFFFFF"/>
-                    </a:solidFill>
-                  </a:tcPr>
-                </a:tc>
-                <a:tc>
-                  <a:txBody>
-                    <a:bodyPr/>
-                    <a:lstStyle/>
-                    <a:p>
-                      <a:pPr algn="ctr" indent="0" marL="0">
-                        <a:buNone/>
-                      </a:pPr>
-                      <a:r>
-                        <a:rPr lang="en-US" sz="1050" dirty="0">
-                          <a:solidFill>
-                            <a:srgbClr val="1C2B3A"/>
-                          </a:solidFill>
-                          <a:latin typeface="Calibri" pitchFamily="34" charset="0"/>
-                          <a:ea typeface="Calibri" pitchFamily="34" charset="-122"/>
-                          <a:cs typeface="Calibri" pitchFamily="34" charset="-120"/>
-                        </a:rPr>
-                        <a:t>2.1% → 8.1% (3.8×); empirics 2.6%</a:t>
-                      </a:r>
-                      <a:endParaRPr lang="en-US" sz="1050" dirty="0">
-                        <a:latin typeface="Calibri" charset="0"/>
-                        <a:ea typeface="Calibri" charset="0"/>
-                        <a:cs typeface="Calibri" charset="0"/>
-                      </a:endParaRPr>
-                    </a:p>
-                  </a:txBody>
-                  <a:tcPr marL="91440" marR="91440" marT="45720" marB="45720" anchor="ctr">
-                    <a:lnL w="9525" cap="flat" cmpd="sng" algn="ctr">
-                      <a:solidFill>
-                        <a:srgbClr val="E4E9EF"/>
-                      </a:solidFill>
-                      <a:prstDash val="solid"/>
-                      <a:round/>
-                      <a:headEnd type="none" w="med" len="med"/>
-                      <a:tailEnd type="none" w="med" len="med"/>
-                    </a:lnL>
-                    <a:lnR w="9525" cap="flat" cmpd="sng" algn="ctr">
-                      <a:solidFill>
-                        <a:srgbClr val="E4E9EF"/>
-                      </a:solidFill>
-                      <a:prstDash val="solid"/>
-                      <a:round/>
-                      <a:headEnd type="none" w="med" len="med"/>
-                      <a:tailEnd type="none" w="med" len="med"/>
-                    </a:lnR>
-                    <a:lnT w="9525" cap="flat" cmpd="sng" algn="ctr">
-                      <a:solidFill>
-                        <a:srgbClr val="E4E9EF"/>
-                      </a:solidFill>
-                      <a:prstDash val="solid"/>
-                      <a:round/>
-                      <a:headEnd type="none" w="med" len="med"/>
-                      <a:tailEnd type="none" w="med" len="med"/>
-                    </a:lnT>
-                    <a:lnB w="9525" cap="flat" cmpd="sng" algn="ctr">
-                      <a:solidFill>
-                        <a:srgbClr val="E4E9EF"/>
-                      </a:solidFill>
-                      <a:prstDash val="solid"/>
-                      <a:round/>
-                      <a:headEnd type="none" w="med" len="med"/>
-                      <a:tailEnd type="none" w="med" len="med"/>
-                    </a:lnB>
-                    <a:solidFill>
-                      <a:srgbClr val="FFFFFF"/>
-                    </a:solidFill>
-                  </a:tcPr>
-                </a:tc>
-                <a:tc>
-                  <a:txBody>
-                    <a:bodyPr/>
-                    <a:lstStyle/>
-                    <a:p>
-                      <a:pPr algn="ctr" indent="0" marL="0">
-                        <a:buNone/>
-                      </a:pPr>
-                      <a:r>
-                        <a:rPr lang="en-US" sz="1050" b="1" dirty="0">
-                          <a:solidFill>
-                            <a:srgbClr val="B07A00"/>
-                          </a:solidFill>
-                          <a:latin typeface="Calibri" pitchFamily="34" charset="0"/>
-                          <a:ea typeface="Calibri" pitchFamily="34" charset="-122"/>
-                          <a:cs typeface="Calibri" pitchFamily="34" charset="-120"/>
-                        </a:rPr>
-                        <a:t>shape ✓</a:t>
-                      </a:r>
-                      <a:endParaRPr lang="en-US" sz="1050" dirty="0">
-                        <a:latin typeface="Calibri" charset="0"/>
-                        <a:ea typeface="Calibri" charset="0"/>
-                        <a:cs typeface="Calibri" charset="0"/>
-                      </a:endParaRPr>
-                    </a:p>
-                  </a:txBody>
-                  <a:tcPr marL="91440" marR="91440" marT="45720" marB="45720" anchor="ctr">
-                    <a:lnL w="9525" cap="flat" cmpd="sng" algn="ctr">
-                      <a:solidFill>
-                        <a:srgbClr val="E4E9EF"/>
-                      </a:solidFill>
-                      <a:prstDash val="solid"/>
-                      <a:round/>
-                      <a:headEnd type="none" w="med" len="med"/>
-                      <a:tailEnd type="none" w="med" len="med"/>
-                    </a:lnL>
-                    <a:lnR w="9525" cap="flat" cmpd="sng" algn="ctr">
-                      <a:solidFill>
-                        <a:srgbClr val="E4E9EF"/>
-                      </a:solidFill>
-                      <a:prstDash val="solid"/>
-                      <a:round/>
-                      <a:headEnd type="none" w="med" len="med"/>
-                      <a:tailEnd type="none" w="med" len="med"/>
-                    </a:lnR>
-                    <a:lnT w="9525" cap="flat" cmpd="sng" algn="ctr">
-                      <a:solidFill>
-                        <a:srgbClr val="E4E9EF"/>
-                      </a:solidFill>
-                      <a:prstDash val="solid"/>
-                      <a:round/>
-                      <a:headEnd type="none" w="med" len="med"/>
-                      <a:tailEnd type="none" w="med" len="med"/>
-                    </a:lnT>
-                    <a:lnB w="9525" cap="flat" cmpd="sng" algn="ctr">
-                      <a:solidFill>
-                        <a:srgbClr val="E4E9EF"/>
-                      </a:solidFill>
-                      <a:prstDash val="solid"/>
-                      <a:round/>
-                      <a:headEnd type="none" w="med" len="med"/>
-                      <a:tailEnd type="none" w="med" len="med"/>
-                    </a:lnB>
-                    <a:solidFill>
-                      <a:srgbClr val="FFFFFF"/>
-                    </a:solidFill>
-                  </a:tcPr>
-                </a:tc>
-              </a:tr>
-            </a:tbl>
-          </a:graphicData>
-        </a:graphic>
-      </p:graphicFrame>
-      <p:sp>
-        <p:nvSpPr>
-          <p:cNvPr id="5" name="Text 2"/>
-          <p:cNvSpPr/>
-          <p:nvPr/>
-        </p:nvSpPr>
-        <p:spPr>
-          <a:xfrm>
-            <a:off x="548640" y="6419088"/>
-            <a:ext cx="10634472" cy="292608"/>
-          </a:xfrm>
-          <a:prstGeom prst="rect">
-            <a:avLst/>
-          </a:prstGeom>
-          <a:noFill/>
-          <a:ln/>
-        </p:spPr>
-        <p:txBody>
-          <a:bodyPr wrap="square" lIns="0" tIns="0" rIns="0" bIns="0" rtlCol="0" anchor="ctr"/>
-          <a:lstStyle/>
-          <a:p>
-            <a:pPr algn="l" indent="0" marL="0">
-              <a:buNone/>
-            </a:pPr>
-            <a:r>
-              <a:rPr lang="en-US" sz="900" dirty="0">
-                <a:solidFill>
-                  <a:srgbClr val="5B6B7C"/>
-                </a:solidFill>
-                <a:latin typeface="Calibri" pitchFamily="34" charset="0"/>
-                <a:ea typeface="Calibri" pitchFamily="34" charset="-122"/>
-                <a:cs typeface="Calibri" pitchFamily="34" charset="-120"/>
-              </a:rPr>
-              <a:t>Verdicts: 'exact' = matches verified data to rounding; 'close' = within the modeled range; 'wrong' = not supported by play-by-play shot data.</a:t>
-            </a:r>
-            <a:endParaRPr lang="en-US" sz="900" dirty="0"/>
-          </a:p>
-        </p:txBody>
-      </p:sp>
-      <p:sp>
-        <p:nvSpPr>
-          <p:cNvPr id="6" name="Text 3"/>
-          <p:cNvSpPr/>
-          <p:nvPr/>
-        </p:nvSpPr>
-        <p:spPr>
-          <a:xfrm>
-            <a:off x="11274552" y="6419088"/>
-            <a:ext cx="365760" cy="292608"/>
-          </a:xfrm>
-          <a:prstGeom prst="rect">
-            <a:avLst/>
-          </a:prstGeom>
-          <a:noFill/>
-          <a:ln/>
-        </p:spPr>
-        <p:txBody>
-          <a:bodyPr wrap="square" lIns="0" tIns="0" rIns="0" bIns="0" rtlCol="0" anchor="ctr"/>
-          <a:lstStyle/>
-          <a:p>
-            <a:pPr algn="r" indent="0" marL="0">
-              <a:buNone/>
-            </a:pPr>
-            <a:r>
-              <a:rPr lang="en-US" sz="900" dirty="0">
-                <a:solidFill>
-                  <a:srgbClr val="5B6B7C"/>
-                </a:solidFill>
-                <a:latin typeface="Calibri" pitchFamily="34" charset="0"/>
-                <a:ea typeface="Calibri" pitchFamily="34" charset="-122"/>
-                <a:cs typeface="Calibri" pitchFamily="34" charset="-120"/>
-              </a:rPr>
-              <a:t>12</a:t>
-            </a:r>
-            <a:endParaRPr lang="en-US" sz="900" dirty="0"/>
-          </a:p>
-        </p:txBody>
-      </p:sp>
-    </p:spTree>
-  </p:cSld>
-  <p:clrMapOvr>
-    <a:masterClrMapping/>
-  </p:clrMapOvr>
-</p:sld>
-</file>
-
-<file path=ppt/slides/slide13.xml><?xml version="1.0" encoding="utf-8"?>
-<p:sld xmlns:a="http://schemas.openxmlformats.org/drawingml/2006/main" xmlns:r="http://schemas.openxmlformats.org/officeDocument/2006/relationships" xmlns:p="http://schemas.openxmlformats.org/presentationml/2006/main">
-  <p:cSld name="Slide 13">
     <p:bg>
       <p:bgPr>
         <a:solidFill>
@@ -10387,7 +6509,7 @@
                 <a:ea typeface="Calibri" pitchFamily="34" charset="-122"/>
                 <a:cs typeface="Calibri" pitchFamily="34" charset="-120"/>
               </a:rPr>
-              <a:t>Where the video’s inputs failed verification (Edgecombe 8%, ‘765 assists’), the verified numbers are used and flagged on the slide.
+              <a:t>Stat sites draw shot zones differently (corner-3, at-rim); pbpstats’ exact play-by-play counts are used, with alternates noted in slide footers.
 </a:t>
             </a:r>
             <a:pPr indent="0" marL="0">
@@ -10444,7 +6566,7 @@
                 <a:ea typeface="Calibri" pitchFamily="34" charset="-122"/>
                 <a:cs typeface="Calibri" pitchFamily="34" charset="-120"/>
               </a:rPr>
-              <a:t>Original video: TikTok @leah.cammarano · rebuilt July 25, 2026</a:t>
+              <a:t>Compiled July 25, 2026 — the day after the signing.</a:t>
             </a:r>
             <a:endParaRPr lang="en-US" sz="1050" dirty="0"/>
           </a:p>
@@ -12055,7 +8177,7 @@
                 <a:ea typeface="Calibri" pitchFamily="34" charset="-122"/>
                 <a:cs typeface="Calibri" pitchFamily="34" charset="-120"/>
               </a:rPr>
-              <a:t>FanDuel set the post-signing win total at 50.5. Title odds moved +2000 → +900 (DraftKings) within hours. The video projected 51 — same answer, three routes.</a:t>
+              <a:t>FanDuel set the post-signing win total at 50.5. Title odds moved +2000 → +900 (DraftKings) within hours. Two independent routes, one answer.</a:t>
             </a:r>
             <a:endParaRPr lang="en-US" sz="1200" dirty="0"/>
           </a:p>
@@ -12472,7 +8594,7 @@
                 <a:ea typeface="Calibri" pitchFamily="34" charset="-122"/>
                 <a:cs typeface="Calibri" pitchFamily="34" charset="-120"/>
               </a:rPr>
-              <a:t>My model: </a:t>
+              <a:t>The model: </a:t>
             </a:r>
             <a:pPr indent="0" marL="0">
               <a:lnSpc>
@@ -12489,7 +8611,7 @@
                 <a:ea typeface="Calibri" pitchFamily="34" charset="-122"/>
                 <a:cs typeface="Calibri" pitchFamily="34" charset="-120"/>
               </a:rPr>
-              <a:t>Log5 game odds + home court, exact best-of-7, three rounds vs a 48/53/57-win gauntlet. 45 wins → 2.1%; 51 → 8.1%; 52 → 9.7% (4.6×). The video said 4% → 12%, “3.2×” — same shape, softer baseline.
+              <a:t>Log5 game odds + home court, exact best-of-7, three rounds vs a 48/53/57-win playoff gauntlet. 45 wins → 2.1%; 51 → 8.1% (3.8×); 52 → 9.7% (4.6×).
 </a:t>
             </a:r>
             <a:pPr indent="0" marL="0">
@@ -12507,7 +8629,7 @@
                 <a:ea typeface="Calibri" pitchFamily="34" charset="-122"/>
                 <a:cs typeface="Calibri" pitchFamily="34" charset="-120"/>
               </a:rPr>
-              <a:t>History is harsher: </a:t>
+              <a:t>History says the same: </a:t>
             </a:r>
             <a:pPr indent="0" marL="0">
               <a:lnSpc>
@@ -12542,7 +8664,7 @@
                 <a:ea typeface="Calibri" pitchFamily="34" charset="-122"/>
                 <a:cs typeface="Calibri" pitchFamily="34" charset="-120"/>
               </a:rPr>
-              <a:t>Same conclusion, stronger: </a:t>
+              <a:t>The point: </a:t>
             </a:r>
             <a:pPr indent="0" marL="0">
               <a:lnSpc>
@@ -12872,7 +8994,7 @@
                 <a:ea typeface="Calibri" pitchFamily="34" charset="-122"/>
                 <a:cs typeface="Calibri" pitchFamily="34" charset="-120"/>
               </a:rPr>
-              <a:t>guards who joined LeBron saw their assisted share rise +8.4 pts on average (Mo Williams +12.6, D’Angelo Russell +11.1, Kyrie +1.5 — and Kyrie’s 3P assisted share jumped 45.5→61.8%). Applied to Maxey: unassisted falls to ~47% (video said 45%).
+              <a:t>guards who joined LeBron saw their assisted share rise +8.4 pts on average (Mo Williams +12.6, D’Angelo Russell +11.1, Kyrie +1.5 — and Kyrie’s 3P assisted share jumped 45.5→61.8%). Applied to Maxey: unassisted falls to ~47%.
 </a:t>
             </a:r>
             <a:pPr indent="0" marL="0">
@@ -13203,7 +9325,7 @@
                 <a:ea typeface="Calibri" pitchFamily="34" charset="-122"/>
                 <a:cs typeface="Calibri" pitchFamily="34" charset="-120"/>
               </a:rPr>
-              <a:t>restore the healthy-co-star baseline, then add half the average LeBron-arrival premium (+4.0): ~52% assisted (video said 48%). LeBron delivers the ball early in the clock, not with three seconds left.
+              <a:t>restore the healthy-co-star baseline, then add half the average LeBron-arrival premium (+4.0): ~52% assisted. LeBron delivers the ball early in the clock, not with three seconds left.
 </a:t>
             </a:r>
             <a:pPr indent="0" marL="0">
@@ -13260,7 +9382,7 @@
                 <a:ea typeface="Calibri" pitchFamily="34" charset="-122"/>
                 <a:cs typeface="Calibri" pitchFamily="34" charset="-120"/>
               </a:rPr>
-              <a:t>Splits: pbpstats/B-Ref both seasons (25-26: 2P 32.4% astd, 3P 53.6%; 23-24: 42.9%/63.4%). Video’s ‘46%’ for 2023-24 is actually 47.6%.</a:t>
+              <a:t>Splits: pbpstats/B-Ref both seasons (25-26: 2P 32.4% astd, 3P 53.6% astd; 23-24: 42.9%/63.4%).</a:t>
             </a:r>
             <a:endParaRPr lang="en-US" sz="900" dirty="0"/>
           </a:p>
@@ -13552,7 +9674,7 @@
                 <a:ea typeface="Calibri" pitchFamily="34" charset="-122"/>
                 <a:cs typeface="Calibri" pitchFamily="34" charset="-120"/>
               </a:rPr>
-              <a:t>The video said 37% → 42% off “52% of 765 assists” — the right idea with the wrong inputs: it’s 34.9%, and 42.1% of 432.</a:t>
+              <a:t>Bosh and Love both saw double-digit jumps in assisted makes the year LeBron arrived. Embiid is a better interior finisher than either.</a:t>
             </a:r>
             <a:endParaRPr lang="en-US" sz="1250" dirty="0"/>
           </a:p>
@@ -13877,13 +9999,13 @@
             <a:r>
               <a:rPr lang="en-US" sz="1250" i="1" dirty="0">
                 <a:solidFill>
-                  <a:srgbClr val="C8102E"/>
+                  <a:srgbClr val="1C2B3A"/>
                 </a:solidFill>
                 <a:latin typeface="Calibri" pitchFamily="34" charset="0"/>
                 <a:ea typeface="Calibri" pitchFamily="34" charset="-122"/>
                 <a:cs typeface="Calibri" pitchFamily="34" charset="-120"/>
               </a:rPr>
-              <a:t>Honest note: the video’s 8% → 12% doesn’t match the shot data (5.5% baseline, 25 makes). The free points are real; the magnitude is smaller.</a:t>
+              <a:t>A ~30% relative jump in the most efficient catch-and-shoot look in basketball — free points that were just sitting there.</a:t>
             </a:r>
             <a:endParaRPr lang="en-US" sz="1250" dirty="0"/>
           </a:p>
@@ -13922,7 +10044,7 @@
                 <a:ea typeface="Calibri" pitchFamily="34" charset="-122"/>
                 <a:cs typeface="Calibri" pitchFamily="34" charset="-120"/>
               </a:rPr>
-              <a:t>Corner-3 counts: pbpstats (25 makes / 67 att). B-Ref’s different corner definition gives ~20 — either way, well under the video’s 8%.</a:t>
+              <a:t>Corner-3 counts: pbpstats (25 makes / 67 attempts). B-Ref’s different corner-zone definition gives ~20 makes.</a:t>
             </a:r>
             <a:endParaRPr lang="en-US" sz="900" dirty="0"/>
           </a:p>
